--- a/downloads/templates/Template_Experiment_Readout_AB_v1.pptx
+++ b/downloads/templates/Template_Experiment_Readout_AB_v1.pptx
@@ -236,7 +236,7 @@
           <c:showBubbleSize val="0"/>
           <c:showLeaderLines val="0"/>
         </c:dLbls>
-        <c:gapWidth val="70"/>
+        <c:gapWidth val="80"/>
         <c:overlap val="0"/>
         <c:axId val="2094734554"/>
         <c:axId val="2094734552"/>
@@ -468,7 +468,7 @@
           <c:showBubbleSize val="0"/>
           <c:showLeaderLines val="0"/>
         </c:dLbls>
-        <c:gapWidth val="90"/>
+        <c:gapWidth val="100"/>
         <c:overlap val="0"/>
         <c:axId val="2094734554"/>
         <c:axId val="2094734552"/>
@@ -2243,7 +2243,7 @@
         </p:nvSpPr>
         <p:spPr>
           <a:xfrm>
-            <a:off x="457200" y="1234440"/>
+            <a:off x="685800" y="1325880"/>
             <a:ext cx="2286000" cy="365760"/>
           </a:xfrm>
           <a:prstGeom prst="roundRect">
@@ -2270,7 +2270,7 @@
         </p:nvSpPr>
         <p:spPr>
           <a:xfrm>
-            <a:off x="457200" y="1234440"/>
+            <a:off x="685800" y="1325880"/>
             <a:ext cx="2286000" cy="365760"/>
           </a:xfrm>
           <a:prstGeom prst="rect">
@@ -2309,8 +2309,8 @@
         </p:nvSpPr>
         <p:spPr>
           <a:xfrm>
-            <a:off x="457200" y="1783080"/>
-            <a:ext cx="10972800" cy="1463040"/>
+            <a:off x="685800" y="1874520"/>
+            <a:ext cx="10820095" cy="1371600"/>
           </a:xfrm>
           <a:prstGeom prst="rect">
             <a:avLst/>
@@ -2348,8 +2348,8 @@
         </p:nvSpPr>
         <p:spPr>
           <a:xfrm>
-            <a:off x="457200" y="3383280"/>
-            <a:ext cx="7863840" cy="914400"/>
+            <a:off x="685800" y="3429000"/>
+            <a:ext cx="7498080" cy="822960"/>
           </a:xfrm>
           <a:prstGeom prst="rect">
             <a:avLst/>
@@ -2373,7 +2373,7 @@
                 <a:ea typeface="Hanken Grotesk" pitchFamily="34" charset="-122"/>
                 <a:cs typeface="Hanken Grotesk" pitchFamily="34" charset="-120"/>
               </a:rPr>
-              <a:t>Labore et dolore magna aliqua ut enim ad minim veniam quis nostrud exercitation ullamco laboris nisi ut aliquip.</a:t>
+              <a:t>Labore et dolore magna aliqua ut enim ad minim veniam quis nostrud exercitation ullamco.</a:t>
             </a:r>
             <a:endParaRPr lang="en-US" sz="1800" dirty="0"/>
           </a:p>
@@ -2387,7 +2387,7 @@
         </p:nvSpPr>
         <p:spPr>
           <a:xfrm>
-            <a:off x="457200" y="4572000"/>
+            <a:off x="685800" y="4572000"/>
             <a:ext cx="7315200" cy="320040"/>
           </a:xfrm>
           <a:prstGeom prst="rect">
@@ -2426,7 +2426,7 @@
         </p:nvSpPr>
         <p:spPr>
           <a:xfrm>
-            <a:off x="457200" y="5989320"/>
+            <a:off x="685800" y="5943600"/>
             <a:ext cx="7315200" cy="320040"/>
           </a:xfrm>
           <a:prstGeom prst="rect">
@@ -2497,8 +2497,8 @@
         </p:nvSpPr>
         <p:spPr>
           <a:xfrm>
-            <a:off x="457200" y="384048"/>
-            <a:ext cx="8961120" cy="274320"/>
+            <a:off x="685800" y="502920"/>
+            <a:ext cx="8595360" cy="274320"/>
           </a:xfrm>
           <a:prstGeom prst="rect">
             <a:avLst/>
@@ -2536,8 +2536,8 @@
         </p:nvSpPr>
         <p:spPr>
           <a:xfrm>
-            <a:off x="457200" y="676656"/>
-            <a:ext cx="11274552" cy="868680"/>
+            <a:off x="685800" y="804672"/>
+            <a:ext cx="10820095" cy="566928"/>
           </a:xfrm>
           <a:prstGeom prst="rect">
             <a:avLst/>
@@ -2556,7 +2556,7 @@
               <a:buNone/>
             </a:pPr>
             <a:r>
-              <a:rPr lang="en-US" sz="3000" b="1" dirty="0">
+              <a:rPr lang="en-US" sz="2800" b="1" dirty="0">
                 <a:solidFill>
                   <a:srgbClr val="222731"/>
                 </a:solidFill>
@@ -2564,9 +2564,9 @@
                 <a:ea typeface="Bricolage Grotesque" pitchFamily="34" charset="-122"/>
                 <a:cs typeface="Bricolage Grotesque" pitchFamily="34" charset="-120"/>
               </a:rPr>
-              <a:t>Sint occaecat cupidatat non proident sunt in culpa qui officia</a:t>
-            </a:r>
-            <a:endParaRPr lang="en-US" sz="3000" dirty="0"/>
+              <a:t>Sint occaecat cupidatat non proident sunt in</a:t>
+            </a:r>
+            <a:endParaRPr lang="en-US" sz="2800" dirty="0"/>
           </a:p>
         </p:txBody>
       </p:sp>
@@ -2578,7 +2578,7 @@
         </p:nvSpPr>
         <p:spPr>
           <a:xfrm>
-            <a:off x="457200" y="6400800"/>
+            <a:off x="685800" y="6400800"/>
             <a:ext cx="4389120" cy="256032"/>
           </a:xfrm>
           <a:prstGeom prst="rect">
@@ -2618,7 +2618,7 @@
         <p:spPr>
           <a:xfrm>
             <a:off x="4937760" y="6400800"/>
-            <a:ext cx="5943600" cy="256032"/>
+            <a:ext cx="5790895" cy="256032"/>
           </a:xfrm>
           <a:prstGeom prst="rect">
             <a:avLst/>
@@ -2656,7 +2656,7 @@
         </p:nvSpPr>
         <p:spPr>
           <a:xfrm>
-            <a:off x="11091672" y="6400800"/>
+            <a:off x="10865815" y="6400800"/>
             <a:ext cx="640080" cy="256032"/>
           </a:xfrm>
           <a:prstGeom prst="rect">
@@ -2695,12 +2695,12 @@
         </p:nvSpPr>
         <p:spPr>
           <a:xfrm>
-            <a:off x="457200" y="1783080"/>
-            <a:ext cx="5486400" cy="4343400"/>
+            <a:off x="685800" y="1691640"/>
+            <a:ext cx="5272888" cy="4069080"/>
           </a:xfrm>
           <a:prstGeom prst="roundRect">
             <a:avLst>
-              <a:gd name="adj" fmla="val 2526"/>
+              <a:gd name="adj" fmla="val 2697"/>
             </a:avLst>
           </a:prstGeom>
           <a:solidFill>
@@ -2722,8 +2722,8 @@
         </p:nvSpPr>
         <p:spPr>
           <a:xfrm>
-            <a:off x="777240" y="2103120"/>
-            <a:ext cx="4572000" cy="274320"/>
+            <a:off x="1051560" y="2057400"/>
+            <a:ext cx="4541368" cy="274320"/>
           </a:xfrm>
           <a:prstGeom prst="rect">
             <a:avLst/>
@@ -2761,8 +2761,8 @@
         </p:nvSpPr>
         <p:spPr>
           <a:xfrm>
-            <a:off x="777240" y="2423160"/>
-            <a:ext cx="4846320" cy="1188720"/>
+            <a:off x="1051560" y="2423160"/>
+            <a:ext cx="4541368" cy="1005840"/>
           </a:xfrm>
           <a:prstGeom prst="rect">
             <a:avLst/>
@@ -2786,7 +2786,7 @@
                 <a:ea typeface="Bricolage Grotesque" pitchFamily="34" charset="-122"/>
                 <a:cs typeface="Bricolage Grotesque" pitchFamily="34" charset="-120"/>
               </a:rPr>
-              <a:t>Fugiat nulla pariatur excepteur sint occaecat cupidatat non proident sunt in culpa.</a:t>
+              <a:t>Fugiat nulla pariatur excepteur sint occaecat cupidatat non proident sunt.</a:t>
             </a:r>
             <a:endParaRPr lang="en-US" sz="2000" dirty="0"/>
           </a:p>
@@ -2800,8 +2800,8 @@
         </p:nvSpPr>
         <p:spPr>
           <a:xfrm>
-            <a:off x="777240" y="3749040"/>
-            <a:ext cx="4846320" cy="2103120"/>
+            <a:off x="1051560" y="3611880"/>
+            <a:ext cx="4541368" cy="1783080"/>
           </a:xfrm>
           <a:prstGeom prst="rect">
             <a:avLst/>
@@ -2825,7 +2825,7 @@
                 <a:ea typeface="Hanken Grotesk" pitchFamily="34" charset="-122"/>
                 <a:cs typeface="Hanken Grotesk" pitchFamily="34" charset="-120"/>
               </a:rPr>
-              <a:t>Amet consectetur adipiscing elit sed do eiusmod tempor incididunt ut labore et dolore magna aliqua ut enim ad minim veniam quis nostrud exercitation ullamco laboris nisi ut aliquip ex ea commodo consequat duis aute irure dolor in reprehenderit in voluptate.</a:t>
+              <a:t>Amet consectetur adipiscing elit sed do eiusmod tempor incididunt ut labore et dolore magna aliqua ut enim ad minim veniam quis nostrud exercitation ullamco laboris nisi.</a:t>
             </a:r>
             <a:endParaRPr lang="en-US" sz="1350" dirty="0"/>
           </a:p>
@@ -2839,12 +2839,12 @@
         </p:nvSpPr>
         <p:spPr>
           <a:xfrm>
-            <a:off x="6263640" y="1783080"/>
-            <a:ext cx="5470855" cy="4343400"/>
+            <a:off x="6233008" y="1691640"/>
+            <a:ext cx="5272888" cy="4069080"/>
           </a:xfrm>
           <a:prstGeom prst="roundRect">
             <a:avLst>
-              <a:gd name="adj" fmla="val 2526"/>
+              <a:gd name="adj" fmla="val 2697"/>
             </a:avLst>
           </a:prstGeom>
           <a:solidFill>
@@ -2866,8 +2866,8 @@
         </p:nvSpPr>
         <p:spPr>
           <a:xfrm>
-            <a:off x="6583680" y="2103120"/>
-            <a:ext cx="4572000" cy="274320"/>
+            <a:off x="6598768" y="2057400"/>
+            <a:ext cx="4541368" cy="274320"/>
           </a:xfrm>
           <a:prstGeom prst="rect">
             <a:avLst/>
@@ -2904,8 +2904,8 @@
           <p:nvPr/>
         </p:nvGraphicFramePr>
         <p:xfrm>
-          <a:off x="6492240" y="2468880"/>
-          <a:ext cx="4967935" cy="2560320"/>
+          <a:off x="6461608" y="2423160"/>
+          <a:ext cx="4815688" cy="2606040"/>
         </p:xfrm>
         <a:graphic xmlns:a="http://schemas.openxmlformats.org/drawingml/2006/main">
           <a:graphicData uri="http://schemas.openxmlformats.org/drawingml/2006/chart">
@@ -2921,8 +2921,8 @@
         </p:nvSpPr>
         <p:spPr>
           <a:xfrm>
-            <a:off x="6583680" y="5257800"/>
-            <a:ext cx="4572000" cy="274320"/>
+            <a:off x="6598768" y="5166360"/>
+            <a:ext cx="4541368" cy="256032"/>
           </a:xfrm>
           <a:prstGeom prst="rect">
             <a:avLst/>
@@ -2992,8 +2992,8 @@
         </p:nvSpPr>
         <p:spPr>
           <a:xfrm>
-            <a:off x="457200" y="384048"/>
-            <a:ext cx="8961120" cy="274320"/>
+            <a:off x="685800" y="502920"/>
+            <a:ext cx="8595360" cy="274320"/>
           </a:xfrm>
           <a:prstGeom prst="rect">
             <a:avLst/>
@@ -3031,8 +3031,8 @@
         </p:nvSpPr>
         <p:spPr>
           <a:xfrm>
-            <a:off x="457200" y="676656"/>
-            <a:ext cx="11274552" cy="868680"/>
+            <a:off x="685800" y="804672"/>
+            <a:ext cx="10820095" cy="566928"/>
           </a:xfrm>
           <a:prstGeom prst="rect">
             <a:avLst/>
@@ -3051,7 +3051,7 @@
               <a:buNone/>
             </a:pPr>
             <a:r>
-              <a:rPr lang="en-US" sz="3000" b="1" dirty="0">
+              <a:rPr lang="en-US" sz="2800" b="1" dirty="0">
                 <a:solidFill>
                   <a:srgbClr val="222731"/>
                 </a:solidFill>
@@ -3059,9 +3059,9 @@
                 <a:ea typeface="Bricolage Grotesque" pitchFamily="34" charset="-122"/>
                 <a:cs typeface="Bricolage Grotesque" pitchFamily="34" charset="-120"/>
               </a:rPr>
-              <a:t>Gravida orci a odio nullam varius turpis et commodo pharetra est</a:t>
-            </a:r>
-            <a:endParaRPr lang="en-US" sz="3000" dirty="0"/>
+              <a:t>Gravida orci a odio nullam varius</a:t>
+            </a:r>
+            <a:endParaRPr lang="en-US" sz="2800" dirty="0"/>
           </a:p>
         </p:txBody>
       </p:sp>
@@ -3073,7 +3073,7 @@
         </p:nvSpPr>
         <p:spPr>
           <a:xfrm>
-            <a:off x="457200" y="6400800"/>
+            <a:off x="685800" y="6400800"/>
             <a:ext cx="4389120" cy="256032"/>
           </a:xfrm>
           <a:prstGeom prst="rect">
@@ -3113,7 +3113,7 @@
         <p:spPr>
           <a:xfrm>
             <a:off x="4937760" y="6400800"/>
-            <a:ext cx="5943600" cy="256032"/>
+            <a:ext cx="5790895" cy="256032"/>
           </a:xfrm>
           <a:prstGeom prst="rect">
             <a:avLst/>
@@ -3151,7 +3151,7 @@
         </p:nvSpPr>
         <p:spPr>
           <a:xfrm>
-            <a:off x="11091672" y="6400800"/>
+            <a:off x="10865815" y="6400800"/>
             <a:ext cx="640080" cy="256032"/>
           </a:xfrm>
           <a:prstGeom prst="rect">
@@ -3190,12 +3190,12 @@
         </p:nvSpPr>
         <p:spPr>
           <a:xfrm>
-            <a:off x="457200" y="1783080"/>
-            <a:ext cx="3383280" cy="4343400"/>
+            <a:off x="685800" y="1691640"/>
+            <a:ext cx="3291840" cy="4069080"/>
           </a:xfrm>
           <a:prstGeom prst="roundRect">
             <a:avLst>
-              <a:gd name="adj" fmla="val 3243"/>
+              <a:gd name="adj" fmla="val 3333"/>
             </a:avLst>
           </a:prstGeom>
           <a:solidFill>
@@ -3217,7 +3217,7 @@
         </p:nvSpPr>
         <p:spPr>
           <a:xfrm>
-            <a:off x="777240" y="2103120"/>
+            <a:off x="1051560" y="2057400"/>
             <a:ext cx="1828800" cy="365760"/>
           </a:xfrm>
           <a:prstGeom prst="roundRect">
@@ -3244,7 +3244,7 @@
         </p:nvSpPr>
         <p:spPr>
           <a:xfrm>
-            <a:off x="777240" y="2103120"/>
+            <a:off x="1051560" y="2057400"/>
             <a:ext cx="1828800" cy="365760"/>
           </a:xfrm>
           <a:prstGeom prst="rect">
@@ -3283,8 +3283,8 @@
         </p:nvSpPr>
         <p:spPr>
           <a:xfrm>
-            <a:off x="777240" y="2651760"/>
-            <a:ext cx="2743200" cy="1463040"/>
+            <a:off x="1051560" y="2651760"/>
+            <a:ext cx="2560320" cy="1280160"/>
           </a:xfrm>
           <a:prstGeom prst="rect">
             <a:avLst/>
@@ -3308,7 +3308,7 @@
                 <a:ea typeface="Bricolage Grotesque" pitchFamily="34" charset="-122"/>
                 <a:cs typeface="Bricolage Grotesque" pitchFamily="34" charset="-120"/>
               </a:rPr>
-              <a:t>Consequat duis aute irure dolor in reprehenderit in.</a:t>
+              <a:t>Consequat duis aute irure dolor in reprehenderit.</a:t>
             </a:r>
             <a:endParaRPr lang="en-US" sz="2000" dirty="0"/>
           </a:p>
@@ -3322,8 +3322,8 @@
         </p:nvSpPr>
         <p:spPr>
           <a:xfrm>
-            <a:off x="777240" y="4297680"/>
-            <a:ext cx="2743200" cy="1645920"/>
+            <a:off x="1051560" y="4206240"/>
+            <a:ext cx="2560320" cy="1188720"/>
           </a:xfrm>
           <a:prstGeom prst="rect">
             <a:avLst/>
@@ -3411,17 +3411,17 @@
           </p:nvPr>
         </p:nvGraphicFramePr>
         <p:xfrm>
-          <a:off x="4114800" y="1783080"/>
-          <a:ext cx="7619695" cy="914400"/>
+          <a:off x="4251960" y="1691640"/>
+          <a:ext cx="7253935" cy="914400"/>
         </p:xfrm>
         <a:graphic>
           <a:graphicData uri="http://schemas.openxmlformats.org/drawingml/2006/table">
             <a:tbl>
               <a:tblPr/>
               <a:tblGrid>
-                <a:gridCol w="731520"/>
-                <a:gridCol w="3687775"/>
-                <a:gridCol w="2011680"/>
+                <a:gridCol w="822960"/>
+                <a:gridCol w="3322015"/>
+                <a:gridCol w="1920240"/>
                 <a:gridCol w="1188720"/>
               </a:tblGrid>
               <a:tr h="457200">
@@ -3451,7 +3451,7 @@
                       </a:endParaRPr>
                     </a:p>
                   </a:txBody>
-                  <a:tcPr marL="137160" marR="137160" marT="0" marB="0" anchor="ctr">
+                  <a:tcPr marL="182880" marR="182880" marT="0" marB="0" anchor="ctr">
                     <a:lnL w="9525" cap="flat" cmpd="sng" algn="ctr">
                       <a:solidFill>
                         <a:srgbClr val="D9D9D6"/>
@@ -3519,7 +3519,7 @@
                       </a:endParaRPr>
                     </a:p>
                   </a:txBody>
-                  <a:tcPr marL="137160" marR="137160" marT="0" marB="0" anchor="ctr">
+                  <a:tcPr marL="182880" marR="182880" marT="0" marB="0" anchor="ctr">
                     <a:lnL w="9525" cap="flat" cmpd="sng" algn="ctr">
                       <a:solidFill>
                         <a:srgbClr val="D9D9D6"/>
@@ -3587,7 +3587,7 @@
                       </a:endParaRPr>
                     </a:p>
                   </a:txBody>
-                  <a:tcPr marL="137160" marR="137160" marT="0" marB="0" anchor="ctr">
+                  <a:tcPr marL="182880" marR="182880" marT="0" marB="0" anchor="ctr">
                     <a:lnL w="9525" cap="flat" cmpd="sng" algn="ctr">
                       <a:solidFill>
                         <a:srgbClr val="D9D9D6"/>
@@ -3655,7 +3655,7 @@
                       </a:endParaRPr>
                     </a:p>
                   </a:txBody>
-                  <a:tcPr marL="137160" marR="137160" marT="0" marB="0" anchor="ctr">
+                  <a:tcPr marL="182880" marR="182880" marT="0" marB="0" anchor="ctr">
                     <a:lnL w="9525" cap="flat" cmpd="sng" algn="ctr">
                       <a:solidFill>
                         <a:srgbClr val="D9D9D6"/>
@@ -3698,7 +3698,7 @@
                   </a:tcPr>
                 </a:tc>
               </a:tr>
-              <a:tr h="777240">
+              <a:tr h="722376">
                 <a:tc>
                   <a:txBody>
                     <a:bodyPr/>
@@ -3725,7 +3725,7 @@
                       </a:endParaRPr>
                     </a:p>
                   </a:txBody>
-                  <a:tcPr marL="137160" marR="137160" marT="0" marB="0" anchor="ctr">
+                  <a:tcPr marL="182880" marR="182880" marT="0" marB="0" anchor="ctr">
                     <a:lnL w="9525" cap="flat" cmpd="sng" algn="ctr">
                       <a:solidFill>
                         <a:srgbClr val="D9D9D6"/>
@@ -3784,7 +3784,7 @@
                           <a:ea typeface="Hanken Grotesk" pitchFamily="34" charset="-122"/>
                           <a:cs typeface="Hanken Grotesk" pitchFamily="34" charset="-120"/>
                         </a:rPr>
-                        <a:t>Ad minim veniam quis nostrud</a:t>
+                        <a:t>Ad minim veniam quis</a:t>
                       </a:r>
                       <a:endParaRPr lang="en-US" sz="1350" dirty="0">
                         <a:latin typeface="Hanken Grotesk" charset="0"/>
@@ -3793,7 +3793,7 @@
                       </a:endParaRPr>
                     </a:p>
                   </a:txBody>
-                  <a:tcPr marL="137160" marR="137160" marT="0" marB="0" anchor="ctr">
+                  <a:tcPr marL="182880" marR="182880" marT="0" marB="0" anchor="ctr">
                     <a:lnL w="9525" cap="flat" cmpd="sng" algn="ctr">
                       <a:solidFill>
                         <a:srgbClr val="D9D9D6"/>
@@ -3861,7 +3861,7 @@
                       </a:endParaRPr>
                     </a:p>
                   </a:txBody>
-                  <a:tcPr marL="137160" marR="137160" marT="0" marB="0" anchor="ctr">
+                  <a:tcPr marL="182880" marR="182880" marT="0" marB="0" anchor="ctr">
                     <a:lnL w="9525" cap="flat" cmpd="sng" algn="ctr">
                       <a:solidFill>
                         <a:srgbClr val="D9D9D6"/>
@@ -3929,7 +3929,7 @@
                       </a:endParaRPr>
                     </a:p>
                   </a:txBody>
-                  <a:tcPr marL="137160" marR="137160" marT="0" marB="0" anchor="ctr">
+                  <a:tcPr marL="182880" marR="182880" marT="0" marB="0" anchor="ctr">
                     <a:lnL w="9525" cap="flat" cmpd="sng" algn="ctr">
                       <a:solidFill>
                         <a:srgbClr val="D9D9D6"/>
@@ -3972,7 +3972,7 @@
                   </a:tcPr>
                 </a:tc>
               </a:tr>
-              <a:tr h="777240">
+              <a:tr h="722376">
                 <a:tc>
                   <a:txBody>
                     <a:bodyPr/>
@@ -3999,7 +3999,7 @@
                       </a:endParaRPr>
                     </a:p>
                   </a:txBody>
-                  <a:tcPr marL="137160" marR="137160" marT="0" marB="0" anchor="ctr">
+                  <a:tcPr marL="182880" marR="182880" marT="0" marB="0" anchor="ctr">
                     <a:lnL w="9525" cap="flat" cmpd="sng" algn="ctr">
                       <a:solidFill>
                         <a:srgbClr val="D9D9D6"/>
@@ -4058,7 +4058,7 @@
                           <a:ea typeface="Hanken Grotesk" pitchFamily="34" charset="-122"/>
                           <a:cs typeface="Hanken Grotesk" pitchFamily="34" charset="-120"/>
                         </a:rPr>
-                        <a:t>Fugiat nulla pariatur excepteur sint</a:t>
+                        <a:t>Fugiat nulla pariatur excepteur</a:t>
                       </a:r>
                       <a:endParaRPr lang="en-US" sz="1350" dirty="0">
                         <a:latin typeface="Hanken Grotesk" charset="0"/>
@@ -4067,7 +4067,7 @@
                       </a:endParaRPr>
                     </a:p>
                   </a:txBody>
-                  <a:tcPr marL="137160" marR="137160" marT="0" marB="0" anchor="ctr">
+                  <a:tcPr marL="182880" marR="182880" marT="0" marB="0" anchor="ctr">
                     <a:lnL w="9525" cap="flat" cmpd="sng" algn="ctr">
                       <a:solidFill>
                         <a:srgbClr val="D9D9D6"/>
@@ -4135,7 +4135,7 @@
                       </a:endParaRPr>
                     </a:p>
                   </a:txBody>
-                  <a:tcPr marL="137160" marR="137160" marT="0" marB="0" anchor="ctr">
+                  <a:tcPr marL="182880" marR="182880" marT="0" marB="0" anchor="ctr">
                     <a:lnL w="9525" cap="flat" cmpd="sng" algn="ctr">
                       <a:solidFill>
                         <a:srgbClr val="D9D9D6"/>
@@ -4203,7 +4203,7 @@
                       </a:endParaRPr>
                     </a:p>
                   </a:txBody>
-                  <a:tcPr marL="137160" marR="137160" marT="0" marB="0" anchor="ctr">
+                  <a:tcPr marL="182880" marR="182880" marT="0" marB="0" anchor="ctr">
                     <a:lnL w="9525" cap="flat" cmpd="sng" algn="ctr">
                       <a:solidFill>
                         <a:srgbClr val="D9D9D6"/>
@@ -4246,7 +4246,7 @@
                   </a:tcPr>
                 </a:tc>
               </a:tr>
-              <a:tr h="777240">
+              <a:tr h="722376">
                 <a:tc>
                   <a:txBody>
                     <a:bodyPr/>
@@ -4273,7 +4273,7 @@
                       </a:endParaRPr>
                     </a:p>
                   </a:txBody>
-                  <a:tcPr marL="137160" marR="137160" marT="0" marB="0" anchor="ctr">
+                  <a:tcPr marL="182880" marR="182880" marT="0" marB="0" anchor="ctr">
                     <a:lnL w="9525" cap="flat" cmpd="sng" algn="ctr">
                       <a:solidFill>
                         <a:srgbClr val="D9D9D6"/>
@@ -4332,7 +4332,7 @@
                           <a:ea typeface="Hanken Grotesk" pitchFamily="34" charset="-122"/>
                           <a:cs typeface="Hanken Grotesk" pitchFamily="34" charset="-120"/>
                         </a:rPr>
-                        <a:t>Odio nullam varius turpis et</a:t>
+                        <a:t>Odio nullam varius turpis</a:t>
                       </a:r>
                       <a:endParaRPr lang="en-US" sz="1350" dirty="0">
                         <a:latin typeface="Hanken Grotesk" charset="0"/>
@@ -4341,7 +4341,7 @@
                       </a:endParaRPr>
                     </a:p>
                   </a:txBody>
-                  <a:tcPr marL="137160" marR="137160" marT="0" marB="0" anchor="ctr">
+                  <a:tcPr marL="182880" marR="182880" marT="0" marB="0" anchor="ctr">
                     <a:lnL w="9525" cap="flat" cmpd="sng" algn="ctr">
                       <a:solidFill>
                         <a:srgbClr val="D9D9D6"/>
@@ -4409,7 +4409,7 @@
                       </a:endParaRPr>
                     </a:p>
                   </a:txBody>
-                  <a:tcPr marL="137160" marR="137160" marT="0" marB="0" anchor="ctr">
+                  <a:tcPr marL="182880" marR="182880" marT="0" marB="0" anchor="ctr">
                     <a:lnL w="9525" cap="flat" cmpd="sng" algn="ctr">
                       <a:solidFill>
                         <a:srgbClr val="D9D9D6"/>
@@ -4477,7 +4477,7 @@
                       </a:endParaRPr>
                     </a:p>
                   </a:txBody>
-                  <a:tcPr marL="137160" marR="137160" marT="0" marB="0" anchor="ctr">
+                  <a:tcPr marL="182880" marR="182880" marT="0" marB="0" anchor="ctr">
                     <a:lnL w="9525" cap="flat" cmpd="sng" algn="ctr">
                       <a:solidFill>
                         <a:srgbClr val="D9D9D6"/>
@@ -4520,7 +4520,7 @@
                   </a:tcPr>
                 </a:tc>
               </a:tr>
-              <a:tr h="777240">
+              <a:tr h="722376">
                 <a:tc>
                   <a:txBody>
                     <a:bodyPr/>
@@ -4547,7 +4547,7 @@
                       </a:endParaRPr>
                     </a:p>
                   </a:txBody>
-                  <a:tcPr marL="137160" marR="137160" marT="0" marB="0" anchor="ctr">
+                  <a:tcPr marL="182880" marR="182880" marT="0" marB="0" anchor="ctr">
                     <a:lnL w="9525" cap="flat" cmpd="sng" algn="ctr">
                       <a:solidFill>
                         <a:srgbClr val="D9D9D6"/>
@@ -4606,7 +4606,7 @@
                           <a:ea typeface="Hanken Grotesk" pitchFamily="34" charset="-122"/>
                           <a:cs typeface="Hanken Grotesk" pitchFamily="34" charset="-120"/>
                         </a:rPr>
-                        <a:t>Amet consectetur adipiscing elit sed</a:t>
+                        <a:t>Amet consectetur adipiscing elit</a:t>
                       </a:r>
                       <a:endParaRPr lang="en-US" sz="1350" dirty="0">
                         <a:latin typeface="Hanken Grotesk" charset="0"/>
@@ -4615,7 +4615,7 @@
                       </a:endParaRPr>
                     </a:p>
                   </a:txBody>
-                  <a:tcPr marL="137160" marR="137160" marT="0" marB="0" anchor="ctr">
+                  <a:tcPr marL="182880" marR="182880" marT="0" marB="0" anchor="ctr">
                     <a:lnL w="9525" cap="flat" cmpd="sng" algn="ctr">
                       <a:solidFill>
                         <a:srgbClr val="D9D9D6"/>
@@ -4683,7 +4683,7 @@
                       </a:endParaRPr>
                     </a:p>
                   </a:txBody>
-                  <a:tcPr marL="137160" marR="137160" marT="0" marB="0" anchor="ctr">
+                  <a:tcPr marL="182880" marR="182880" marT="0" marB="0" anchor="ctr">
                     <a:lnL w="9525" cap="flat" cmpd="sng" algn="ctr">
                       <a:solidFill>
                         <a:srgbClr val="D9D9D6"/>
@@ -4751,7 +4751,7 @@
                       </a:endParaRPr>
                     </a:p>
                   </a:txBody>
-                  <a:tcPr marL="137160" marR="137160" marT="0" marB="0" anchor="ctr">
+                  <a:tcPr marL="182880" marR="182880" marT="0" marB="0" anchor="ctr">
                     <a:lnL w="9525" cap="flat" cmpd="sng" algn="ctr">
                       <a:solidFill>
                         <a:srgbClr val="D9D9D6"/>
@@ -4794,7 +4794,7 @@
                   </a:tcPr>
                 </a:tc>
               </a:tr>
-              <a:tr h="777240">
+              <a:tr h="722376">
                 <a:tc>
                   <a:txBody>
                     <a:bodyPr/>
@@ -4821,7 +4821,7 @@
                       </a:endParaRPr>
                     </a:p>
                   </a:txBody>
-                  <a:tcPr marL="137160" marR="137160" marT="0" marB="0" anchor="ctr">
+                  <a:tcPr marL="182880" marR="182880" marT="0" marB="0" anchor="ctr">
                     <a:lnL w="9525" cap="flat" cmpd="sng" algn="ctr">
                       <a:solidFill>
                         <a:srgbClr val="D9D9D6"/>
@@ -4880,7 +4880,7 @@
                           <a:ea typeface="Hanken Grotesk" pitchFamily="34" charset="-122"/>
                           <a:cs typeface="Hanken Grotesk" pitchFamily="34" charset="-120"/>
                         </a:rPr>
-                        <a:t>Ex ea commodo consequat duis</a:t>
+                        <a:t>Ex ea commodo consequat</a:t>
                       </a:r>
                       <a:endParaRPr lang="en-US" sz="1350" dirty="0">
                         <a:latin typeface="Hanken Grotesk" charset="0"/>
@@ -4889,7 +4889,7 @@
                       </a:endParaRPr>
                     </a:p>
                   </a:txBody>
-                  <a:tcPr marL="137160" marR="137160" marT="0" marB="0" anchor="ctr">
+                  <a:tcPr marL="182880" marR="182880" marT="0" marB="0" anchor="ctr">
                     <a:lnL w="9525" cap="flat" cmpd="sng" algn="ctr">
                       <a:solidFill>
                         <a:srgbClr val="D9D9D6"/>
@@ -4957,7 +4957,7 @@
                       </a:endParaRPr>
                     </a:p>
                   </a:txBody>
-                  <a:tcPr marL="137160" marR="137160" marT="0" marB="0" anchor="ctr">
+                  <a:tcPr marL="182880" marR="182880" marT="0" marB="0" anchor="ctr">
                     <a:lnL w="9525" cap="flat" cmpd="sng" algn="ctr">
                       <a:solidFill>
                         <a:srgbClr val="D9D9D6"/>
@@ -5025,7 +5025,7 @@
                       </a:endParaRPr>
                     </a:p>
                   </a:txBody>
-                  <a:tcPr marL="137160" marR="137160" marT="0" marB="0" anchor="ctr">
+                  <a:tcPr marL="182880" marR="182880" marT="0" marB="0" anchor="ctr">
                     <a:lnL w="9525" cap="flat" cmpd="sng" algn="ctr">
                       <a:solidFill>
                         <a:srgbClr val="D9D9D6"/>
@@ -5112,8 +5112,8 @@
         </p:nvSpPr>
         <p:spPr>
           <a:xfrm>
-            <a:off x="457200" y="384048"/>
-            <a:ext cx="8961120" cy="274320"/>
+            <a:off x="685800" y="502920"/>
+            <a:ext cx="8595360" cy="274320"/>
           </a:xfrm>
           <a:prstGeom prst="rect">
             <a:avLst/>
@@ -5151,8 +5151,8 @@
         </p:nvSpPr>
         <p:spPr>
           <a:xfrm>
-            <a:off x="457200" y="676656"/>
-            <a:ext cx="11274552" cy="868680"/>
+            <a:off x="685800" y="804672"/>
+            <a:ext cx="10820095" cy="566928"/>
           </a:xfrm>
           <a:prstGeom prst="rect">
             <a:avLst/>
@@ -5171,7 +5171,7 @@
               <a:buNone/>
             </a:pPr>
             <a:r>
-              <a:rPr lang="en-US" sz="3000" b="1" dirty="0">
+              <a:rPr lang="en-US" sz="2800" b="1" dirty="0">
                 <a:solidFill>
                   <a:srgbClr val="222731"/>
                 </a:solidFill>
@@ -5181,7 +5181,7 @@
               </a:rPr>
               <a:t>Two ways to turn this template into your deck</a:t>
             </a:r>
-            <a:endParaRPr lang="en-US" sz="3000" dirty="0"/>
+            <a:endParaRPr lang="en-US" sz="2800" dirty="0"/>
           </a:p>
         </p:txBody>
       </p:sp>
@@ -5193,7 +5193,7 @@
         </p:nvSpPr>
         <p:spPr>
           <a:xfrm>
-            <a:off x="457200" y="6400800"/>
+            <a:off x="685800" y="6400800"/>
             <a:ext cx="4389120" cy="256032"/>
           </a:xfrm>
           <a:prstGeom prst="rect">
@@ -5233,7 +5233,7 @@
         <p:spPr>
           <a:xfrm>
             <a:off x="4937760" y="6400800"/>
-            <a:ext cx="5943600" cy="256032"/>
+            <a:ext cx="5790895" cy="256032"/>
           </a:xfrm>
           <a:prstGeom prst="rect">
             <a:avLst/>
@@ -5271,7 +5271,7 @@
         </p:nvSpPr>
         <p:spPr>
           <a:xfrm>
-            <a:off x="11091672" y="6400800"/>
+            <a:off x="10865815" y="6400800"/>
             <a:ext cx="640080" cy="256032"/>
           </a:xfrm>
           <a:prstGeom prst="rect">
@@ -5310,12 +5310,12 @@
         </p:nvSpPr>
         <p:spPr>
           <a:xfrm>
-            <a:off x="457200" y="1783080"/>
-            <a:ext cx="4754880" cy="2011680"/>
+            <a:off x="685800" y="1691640"/>
+            <a:ext cx="4754880" cy="1828800"/>
           </a:xfrm>
           <a:prstGeom prst="roundRect">
             <a:avLst>
-              <a:gd name="adj" fmla="val 5455"/>
+              <a:gd name="adj" fmla="val 6000"/>
             </a:avLst>
           </a:prstGeom>
           <a:solidFill>
@@ -5337,8 +5337,8 @@
         </p:nvSpPr>
         <p:spPr>
           <a:xfrm>
-            <a:off x="731520" y="2011680"/>
-            <a:ext cx="4206240" cy="274320"/>
+            <a:off x="1051560" y="1984248"/>
+            <a:ext cx="4023360" cy="274320"/>
           </a:xfrm>
           <a:prstGeom prst="rect">
             <a:avLst/>
@@ -5376,8 +5376,8 @@
         </p:nvSpPr>
         <p:spPr>
           <a:xfrm>
-            <a:off x="731520" y="2331720"/>
-            <a:ext cx="4206240" cy="1371600"/>
+            <a:off x="1051560" y="2331720"/>
+            <a:ext cx="4023360" cy="1097280"/>
           </a:xfrm>
           <a:prstGeom prst="rect">
             <a:avLst/>
@@ -5391,13 +5391,13 @@
           <a:p>
             <a:pPr marL="342900" indent="-342900">
               <a:spcAft>
-                <a:spcPts val="500"/>
+                <a:spcPts val="400"/>
               </a:spcAft>
               <a:buSzPct val="100000"/>
               <a:buChar char="•"/>
             </a:pPr>
             <a:r>
-              <a:rPr lang="en-US" sz="1350" dirty="0">
+              <a:rPr lang="en-US" sz="1300" dirty="0">
                 <a:solidFill>
                   <a:srgbClr val="222731"/>
                 </a:solidFill>
@@ -5407,18 +5407,18 @@
               </a:rPr>
               <a:t>Replace every lorem ipsum line and dummy number with your content.</a:t>
             </a:r>
-            <a:endParaRPr lang="en-US" sz="1350" dirty="0"/>
+            <a:endParaRPr lang="en-US" sz="1300" dirty="0"/>
           </a:p>
           <a:p>
             <a:pPr marL="342900" indent="-342900">
               <a:spcAft>
-                <a:spcPts val="500"/>
+                <a:spcPts val="400"/>
               </a:spcAft>
               <a:buSzPct val="100000"/>
               <a:buChar char="•"/>
             </a:pPr>
             <a:r>
-              <a:rPr lang="en-US" sz="1350" dirty="0">
+              <a:rPr lang="en-US" sz="1300" dirty="0">
                 <a:solidFill>
                   <a:srgbClr val="222731"/>
                 </a:solidFill>
@@ -5428,18 +5428,18 @@
               </a:rPr>
               <a:t>Keep the layouts. Delete slides you have no evidence for.</a:t>
             </a:r>
-            <a:endParaRPr lang="en-US" sz="1350" dirty="0"/>
+            <a:endParaRPr lang="en-US" sz="1300" dirty="0"/>
           </a:p>
           <a:p>
             <a:pPr marL="342900" indent="-342900">
               <a:spcAft>
-                <a:spcPts val="500"/>
+                <a:spcPts val="400"/>
               </a:spcAft>
               <a:buSzPct val="100000"/>
               <a:buChar char="•"/>
             </a:pPr>
             <a:r>
-              <a:rPr lang="en-US" sz="1350" dirty="0">
+              <a:rPr lang="en-US" sz="1300" dirty="0">
                 <a:solidFill>
                   <a:srgbClr val="222731"/>
                 </a:solidFill>
@@ -5449,7 +5449,7 @@
               </a:rPr>
               <a:t>Put real screenshots behind the grey phone screens.</a:t>
             </a:r>
-            <a:endParaRPr lang="en-US" sz="1350" dirty="0"/>
+            <a:endParaRPr lang="en-US" sz="1300" dirty="0"/>
           </a:p>
         </p:txBody>
       </p:sp>
@@ -5461,12 +5461,12 @@
         </p:nvSpPr>
         <p:spPr>
           <a:xfrm>
-            <a:off x="457200" y="3977640"/>
-            <a:ext cx="4754880" cy="2148840"/>
+            <a:off x="685800" y="3794760"/>
+            <a:ext cx="4754880" cy="1965960"/>
           </a:xfrm>
           <a:prstGeom prst="roundRect">
             <a:avLst>
-              <a:gd name="adj" fmla="val 5106"/>
+              <a:gd name="adj" fmla="val 5581"/>
             </a:avLst>
           </a:prstGeom>
           <a:solidFill>
@@ -5488,8 +5488,8 @@
         </p:nvSpPr>
         <p:spPr>
           <a:xfrm>
-            <a:off x="731520" y="4206240"/>
-            <a:ext cx="4206240" cy="274320"/>
+            <a:off x="1051560" y="4087368"/>
+            <a:ext cx="4023360" cy="274320"/>
           </a:xfrm>
           <a:prstGeom prst="rect">
             <a:avLst/>
@@ -5513,7 +5513,7 @@
                 <a:ea typeface="Hanken Grotesk" pitchFamily="34" charset="-122"/>
                 <a:cs typeface="Hanken Grotesk" pitchFamily="34" charset="-120"/>
               </a:rPr>
-              <a:t>OPTION B · USE YOUR AI TOOL</a:t>
+              <a:t>OPTION B · USE CLAUDE</a:t>
             </a:r>
             <a:endParaRPr lang="en-US" sz="1050" dirty="0"/>
           </a:p>
@@ -5527,8 +5527,8 @@
         </p:nvSpPr>
         <p:spPr>
           <a:xfrm>
-            <a:off x="731520" y="4526280"/>
-            <a:ext cx="4206240" cy="274320"/>
+            <a:off x="1051560" y="4416552"/>
+            <a:ext cx="4023360" cy="274320"/>
           </a:xfrm>
           <a:prstGeom prst="rect">
             <a:avLst/>
@@ -5552,7 +5552,7 @@
                 <a:ea typeface="Hanken Grotesk" pitchFamily="34" charset="-122"/>
                 <a:cs typeface="Hanken Grotesk" pitchFamily="34" charset="-120"/>
               </a:rPr>
-              <a:t>Attach cx-presentation-system.md, then write:</a:t>
+              <a:t>Attach the Storyloom spec, then write:</a:t>
             </a:r>
             <a:endParaRPr lang="en-US" sz="1350" dirty="0"/>
           </a:p>
@@ -5566,12 +5566,12 @@
         </p:nvSpPr>
         <p:spPr>
           <a:xfrm>
-            <a:off x="731520" y="4846320"/>
-            <a:ext cx="4206240" cy="1097280"/>
+            <a:off x="1051560" y="4782312"/>
+            <a:ext cx="4023360" cy="704088"/>
           </a:xfrm>
           <a:prstGeom prst="roundRect">
             <a:avLst>
-              <a:gd name="adj" fmla="val 6667"/>
+              <a:gd name="adj" fmla="val 10390"/>
             </a:avLst>
           </a:prstGeom>
           <a:solidFill>
@@ -5593,8 +5593,8 @@
         </p:nvSpPr>
         <p:spPr>
           <a:xfrm>
-            <a:off x="868680" y="4892040"/>
-            <a:ext cx="3931920" cy="1005840"/>
+            <a:off x="1188720" y="4782312"/>
+            <a:ext cx="3749040" cy="704088"/>
           </a:xfrm>
           <a:prstGeom prst="rect">
             <a:avLst/>
@@ -5632,8 +5632,8 @@
         </p:nvSpPr>
         <p:spPr>
           <a:xfrm>
-            <a:off x="5577840" y="1783080"/>
-            <a:ext cx="6156655" cy="274320"/>
+            <a:off x="5989320" y="1691640"/>
+            <a:ext cx="5516575" cy="274320"/>
           </a:xfrm>
           <a:prstGeom prst="rect">
             <a:avLst/>
@@ -5671,8 +5671,8 @@
         </p:nvSpPr>
         <p:spPr>
           <a:xfrm>
-            <a:off x="5577840" y="2148840"/>
-            <a:ext cx="411480" cy="329184"/>
+            <a:off x="5989320" y="2075688"/>
+            <a:ext cx="411480" cy="347472"/>
           </a:xfrm>
           <a:prstGeom prst="rect">
             <a:avLst/>
@@ -5710,8 +5710,8 @@
         </p:nvSpPr>
         <p:spPr>
           <a:xfrm>
-            <a:off x="6035040" y="2148840"/>
-            <a:ext cx="3322015" cy="329184"/>
+            <a:off x="6446520" y="2075688"/>
+            <a:ext cx="2681935" cy="347472"/>
           </a:xfrm>
           <a:prstGeom prst="rect">
             <a:avLst/>
@@ -5749,8 +5749,8 @@
         </p:nvSpPr>
         <p:spPr>
           <a:xfrm>
-            <a:off x="9402775" y="2148840"/>
-            <a:ext cx="2331720" cy="329184"/>
+            <a:off x="9174175" y="2075688"/>
+            <a:ext cx="2331720" cy="347472"/>
           </a:xfrm>
           <a:prstGeom prst="rect">
             <a:avLst/>
@@ -5788,8 +5788,8 @@
         </p:nvSpPr>
         <p:spPr>
           <a:xfrm>
-            <a:off x="5577840" y="2478024"/>
-            <a:ext cx="6156655" cy="0"/>
+            <a:off x="5989320" y="2423160"/>
+            <a:ext cx="5516575" cy="0"/>
           </a:xfrm>
           <a:prstGeom prst="line">
             <a:avLst/>
@@ -5811,8 +5811,8 @@
         </p:nvSpPr>
         <p:spPr>
           <a:xfrm>
-            <a:off x="5577840" y="2478024"/>
-            <a:ext cx="411480" cy="329184"/>
+            <a:off x="5989320" y="2423160"/>
+            <a:ext cx="411480" cy="347472"/>
           </a:xfrm>
           <a:prstGeom prst="rect">
             <a:avLst/>
@@ -5850,8 +5850,8 @@
         </p:nvSpPr>
         <p:spPr>
           <a:xfrm>
-            <a:off x="6035040" y="2478024"/>
-            <a:ext cx="3322015" cy="329184"/>
+            <a:off x="6446520" y="2423160"/>
+            <a:ext cx="2681935" cy="347472"/>
           </a:xfrm>
           <a:prstGeom prst="rect">
             <a:avLst/>
@@ -5889,8 +5889,8 @@
         </p:nvSpPr>
         <p:spPr>
           <a:xfrm>
-            <a:off x="9402775" y="2478024"/>
-            <a:ext cx="2331720" cy="329184"/>
+            <a:off x="9174175" y="2423160"/>
+            <a:ext cx="2331720" cy="347472"/>
           </a:xfrm>
           <a:prstGeom prst="rect">
             <a:avLst/>
@@ -5928,8 +5928,8 @@
         </p:nvSpPr>
         <p:spPr>
           <a:xfrm>
-            <a:off x="5577840" y="2807208"/>
-            <a:ext cx="6156655" cy="0"/>
+            <a:off x="5989320" y="2770632"/>
+            <a:ext cx="5516575" cy="0"/>
           </a:xfrm>
           <a:prstGeom prst="line">
             <a:avLst/>
@@ -5951,8 +5951,8 @@
         </p:nvSpPr>
         <p:spPr>
           <a:xfrm>
-            <a:off x="5577840" y="2807208"/>
-            <a:ext cx="411480" cy="329184"/>
+            <a:off x="5989320" y="2770632"/>
+            <a:ext cx="411480" cy="347472"/>
           </a:xfrm>
           <a:prstGeom prst="rect">
             <a:avLst/>
@@ -5990,8 +5990,8 @@
         </p:nvSpPr>
         <p:spPr>
           <a:xfrm>
-            <a:off x="6035040" y="2807208"/>
-            <a:ext cx="3322015" cy="329184"/>
+            <a:off x="6446520" y="2770632"/>
+            <a:ext cx="2681935" cy="347472"/>
           </a:xfrm>
           <a:prstGeom prst="rect">
             <a:avLst/>
@@ -6029,8 +6029,8 @@
         </p:nvSpPr>
         <p:spPr>
           <a:xfrm>
-            <a:off x="9402775" y="2807208"/>
-            <a:ext cx="2331720" cy="329184"/>
+            <a:off x="9174175" y="2770632"/>
+            <a:ext cx="2331720" cy="347472"/>
           </a:xfrm>
           <a:prstGeom prst="rect">
             <a:avLst/>
@@ -6068,8 +6068,8 @@
         </p:nvSpPr>
         <p:spPr>
           <a:xfrm>
-            <a:off x="5577840" y="3136392"/>
-            <a:ext cx="6156655" cy="0"/>
+            <a:off x="5989320" y="3118104"/>
+            <a:ext cx="5516575" cy="0"/>
           </a:xfrm>
           <a:prstGeom prst="line">
             <a:avLst/>
@@ -6091,8 +6091,8 @@
         </p:nvSpPr>
         <p:spPr>
           <a:xfrm>
-            <a:off x="5577840" y="3136392"/>
-            <a:ext cx="411480" cy="329184"/>
+            <a:off x="5989320" y="3118104"/>
+            <a:ext cx="411480" cy="347472"/>
           </a:xfrm>
           <a:prstGeom prst="rect">
             <a:avLst/>
@@ -6130,8 +6130,8 @@
         </p:nvSpPr>
         <p:spPr>
           <a:xfrm>
-            <a:off x="6035040" y="3136392"/>
-            <a:ext cx="3322015" cy="329184"/>
+            <a:off x="6446520" y="3118104"/>
+            <a:ext cx="2681935" cy="347472"/>
           </a:xfrm>
           <a:prstGeom prst="rect">
             <a:avLst/>
@@ -6169,8 +6169,8 @@
         </p:nvSpPr>
         <p:spPr>
           <a:xfrm>
-            <a:off x="9402775" y="3136392"/>
-            <a:ext cx="2331720" cy="329184"/>
+            <a:off x="9174175" y="3118104"/>
+            <a:ext cx="2331720" cy="347472"/>
           </a:xfrm>
           <a:prstGeom prst="rect">
             <a:avLst/>
@@ -6208,8 +6208,8 @@
         </p:nvSpPr>
         <p:spPr>
           <a:xfrm>
-            <a:off x="5577840" y="3465576"/>
-            <a:ext cx="6156655" cy="0"/>
+            <a:off x="5989320" y="3465576"/>
+            <a:ext cx="5516575" cy="0"/>
           </a:xfrm>
           <a:prstGeom prst="line">
             <a:avLst/>
@@ -6231,8 +6231,8 @@
         </p:nvSpPr>
         <p:spPr>
           <a:xfrm>
-            <a:off x="5577840" y="3465576"/>
-            <a:ext cx="411480" cy="329184"/>
+            <a:off x="5989320" y="3465576"/>
+            <a:ext cx="411480" cy="347472"/>
           </a:xfrm>
           <a:prstGeom prst="rect">
             <a:avLst/>
@@ -6270,8 +6270,8 @@
         </p:nvSpPr>
         <p:spPr>
           <a:xfrm>
-            <a:off x="6035040" y="3465576"/>
-            <a:ext cx="3322015" cy="329184"/>
+            <a:off x="6446520" y="3465576"/>
+            <a:ext cx="2681935" cy="347472"/>
           </a:xfrm>
           <a:prstGeom prst="rect">
             <a:avLst/>
@@ -6309,8 +6309,8 @@
         </p:nvSpPr>
         <p:spPr>
           <a:xfrm>
-            <a:off x="9402775" y="3465576"/>
-            <a:ext cx="2331720" cy="329184"/>
+            <a:off x="9174175" y="3465576"/>
+            <a:ext cx="2331720" cy="347472"/>
           </a:xfrm>
           <a:prstGeom prst="rect">
             <a:avLst/>
@@ -6348,8 +6348,8 @@
         </p:nvSpPr>
         <p:spPr>
           <a:xfrm>
-            <a:off x="5577840" y="3794760"/>
-            <a:ext cx="6156655" cy="0"/>
+            <a:off x="5989320" y="3813048"/>
+            <a:ext cx="5516575" cy="0"/>
           </a:xfrm>
           <a:prstGeom prst="line">
             <a:avLst/>
@@ -6371,8 +6371,8 @@
         </p:nvSpPr>
         <p:spPr>
           <a:xfrm>
-            <a:off x="5577840" y="3794760"/>
-            <a:ext cx="411480" cy="329184"/>
+            <a:off x="5989320" y="3813048"/>
+            <a:ext cx="411480" cy="347472"/>
           </a:xfrm>
           <a:prstGeom prst="rect">
             <a:avLst/>
@@ -6410,8 +6410,8 @@
         </p:nvSpPr>
         <p:spPr>
           <a:xfrm>
-            <a:off x="6035040" y="3794760"/>
-            <a:ext cx="3322015" cy="329184"/>
+            <a:off x="6446520" y="3813048"/>
+            <a:ext cx="2681935" cy="347472"/>
           </a:xfrm>
           <a:prstGeom prst="rect">
             <a:avLst/>
@@ -6449,8 +6449,8 @@
         </p:nvSpPr>
         <p:spPr>
           <a:xfrm>
-            <a:off x="9402775" y="3794760"/>
-            <a:ext cx="2331720" cy="329184"/>
+            <a:off x="9174175" y="3813048"/>
+            <a:ext cx="2331720" cy="347472"/>
           </a:xfrm>
           <a:prstGeom prst="rect">
             <a:avLst/>
@@ -6488,8 +6488,8 @@
         </p:nvSpPr>
         <p:spPr>
           <a:xfrm>
-            <a:off x="5577840" y="4123944"/>
-            <a:ext cx="6156655" cy="0"/>
+            <a:off x="5989320" y="4160520"/>
+            <a:ext cx="5516575" cy="0"/>
           </a:xfrm>
           <a:prstGeom prst="line">
             <a:avLst/>
@@ -6511,8 +6511,8 @@
         </p:nvSpPr>
         <p:spPr>
           <a:xfrm>
-            <a:off x="5577840" y="4123944"/>
-            <a:ext cx="411480" cy="329184"/>
+            <a:off x="5989320" y="4160520"/>
+            <a:ext cx="411480" cy="347472"/>
           </a:xfrm>
           <a:prstGeom prst="rect">
             <a:avLst/>
@@ -6550,8 +6550,8 @@
         </p:nvSpPr>
         <p:spPr>
           <a:xfrm>
-            <a:off x="6035040" y="4123944"/>
-            <a:ext cx="3322015" cy="329184"/>
+            <a:off x="6446520" y="4160520"/>
+            <a:ext cx="2681935" cy="347472"/>
           </a:xfrm>
           <a:prstGeom prst="rect">
             <a:avLst/>
@@ -6589,8 +6589,8 @@
         </p:nvSpPr>
         <p:spPr>
           <a:xfrm>
-            <a:off x="9402775" y="4123944"/>
-            <a:ext cx="2331720" cy="329184"/>
+            <a:off x="9174175" y="4160520"/>
+            <a:ext cx="2331720" cy="347472"/>
           </a:xfrm>
           <a:prstGeom prst="rect">
             <a:avLst/>
@@ -6628,8 +6628,8 @@
         </p:nvSpPr>
         <p:spPr>
           <a:xfrm>
-            <a:off x="5577840" y="4453128"/>
-            <a:ext cx="6156655" cy="0"/>
+            <a:off x="5989320" y="4507992"/>
+            <a:ext cx="5516575" cy="0"/>
           </a:xfrm>
           <a:prstGeom prst="line">
             <a:avLst/>
@@ -6651,8 +6651,8 @@
         </p:nvSpPr>
         <p:spPr>
           <a:xfrm>
-            <a:off x="5577840" y="4453128"/>
-            <a:ext cx="411480" cy="329184"/>
+            <a:off x="5989320" y="4507992"/>
+            <a:ext cx="411480" cy="347472"/>
           </a:xfrm>
           <a:prstGeom prst="rect">
             <a:avLst/>
@@ -6690,8 +6690,8 @@
         </p:nvSpPr>
         <p:spPr>
           <a:xfrm>
-            <a:off x="6035040" y="4453128"/>
-            <a:ext cx="3322015" cy="329184"/>
+            <a:off x="6446520" y="4507992"/>
+            <a:ext cx="2681935" cy="347472"/>
           </a:xfrm>
           <a:prstGeom prst="rect">
             <a:avLst/>
@@ -6729,8 +6729,8 @@
         </p:nvSpPr>
         <p:spPr>
           <a:xfrm>
-            <a:off x="9402775" y="4453128"/>
-            <a:ext cx="2331720" cy="329184"/>
+            <a:off x="9174175" y="4507992"/>
+            <a:ext cx="2331720" cy="347472"/>
           </a:xfrm>
           <a:prstGeom prst="rect">
             <a:avLst/>
@@ -6768,8 +6768,8 @@
         </p:nvSpPr>
         <p:spPr>
           <a:xfrm>
-            <a:off x="5577840" y="4782312"/>
-            <a:ext cx="6156655" cy="0"/>
+            <a:off x="5989320" y="4855464"/>
+            <a:ext cx="5516575" cy="0"/>
           </a:xfrm>
           <a:prstGeom prst="line">
             <a:avLst/>
@@ -6791,8 +6791,8 @@
         </p:nvSpPr>
         <p:spPr>
           <a:xfrm>
-            <a:off x="5577840" y="4782312"/>
-            <a:ext cx="411480" cy="329184"/>
+            <a:off x="5989320" y="4855464"/>
+            <a:ext cx="411480" cy="347472"/>
           </a:xfrm>
           <a:prstGeom prst="rect">
             <a:avLst/>
@@ -6830,8 +6830,8 @@
         </p:nvSpPr>
         <p:spPr>
           <a:xfrm>
-            <a:off x="6035040" y="4782312"/>
-            <a:ext cx="3322015" cy="329184"/>
+            <a:off x="6446520" y="4855464"/>
+            <a:ext cx="2681935" cy="347472"/>
           </a:xfrm>
           <a:prstGeom prst="rect">
             <a:avLst/>
@@ -6869,8 +6869,8 @@
         </p:nvSpPr>
         <p:spPr>
           <a:xfrm>
-            <a:off x="9402775" y="4782312"/>
-            <a:ext cx="2331720" cy="329184"/>
+            <a:off x="9174175" y="4855464"/>
+            <a:ext cx="2331720" cy="347472"/>
           </a:xfrm>
           <a:prstGeom prst="rect">
             <a:avLst/>
@@ -6908,8 +6908,8 @@
         </p:nvSpPr>
         <p:spPr>
           <a:xfrm>
-            <a:off x="5577840" y="6172200"/>
-            <a:ext cx="6156655" cy="228600"/>
+            <a:off x="5989320" y="5989320"/>
+            <a:ext cx="5516575" cy="256032"/>
           </a:xfrm>
           <a:prstGeom prst="rect">
             <a:avLst/>
@@ -6979,8 +6979,8 @@
         </p:nvSpPr>
         <p:spPr>
           <a:xfrm>
-            <a:off x="457200" y="384048"/>
-            <a:ext cx="8961120" cy="274320"/>
+            <a:off x="685800" y="502920"/>
+            <a:ext cx="8595360" cy="274320"/>
           </a:xfrm>
           <a:prstGeom prst="rect">
             <a:avLst/>
@@ -7018,8 +7018,8 @@
         </p:nvSpPr>
         <p:spPr>
           <a:xfrm>
-            <a:off x="457200" y="676656"/>
-            <a:ext cx="11274552" cy="868680"/>
+            <a:off x="685800" y="804672"/>
+            <a:ext cx="10820095" cy="566928"/>
           </a:xfrm>
           <a:prstGeom prst="rect">
             <a:avLst/>
@@ -7038,7 +7038,7 @@
               <a:buNone/>
             </a:pPr>
             <a:r>
-              <a:rPr lang="en-US" sz="3000" b="1" dirty="0">
+              <a:rPr lang="en-US" sz="2800" b="1" dirty="0">
                 <a:solidFill>
                   <a:srgbClr val="222731"/>
                 </a:solidFill>
@@ -7046,9 +7046,9 @@
                 <a:ea typeface="Bricolage Grotesque" pitchFamily="34" charset="-122"/>
                 <a:cs typeface="Bricolage Grotesque" pitchFamily="34" charset="-120"/>
               </a:rPr>
-              <a:t>Elit sed do eiusmod tempor incididunt ut labore et</a:t>
-            </a:r>
-            <a:endParaRPr lang="en-US" sz="3000" dirty="0"/>
+              <a:t>Elit sed do eiusmod tempor incididunt</a:t>
+            </a:r>
+            <a:endParaRPr lang="en-US" sz="2800" dirty="0"/>
           </a:p>
         </p:txBody>
       </p:sp>
@@ -7060,7 +7060,7 @@
         </p:nvSpPr>
         <p:spPr>
           <a:xfrm>
-            <a:off x="457200" y="6400800"/>
+            <a:off x="685800" y="6400800"/>
             <a:ext cx="4389120" cy="256032"/>
           </a:xfrm>
           <a:prstGeom prst="rect">
@@ -7100,7 +7100,7 @@
         <p:spPr>
           <a:xfrm>
             <a:off x="4937760" y="6400800"/>
-            <a:ext cx="5943600" cy="256032"/>
+            <a:ext cx="5790895" cy="256032"/>
           </a:xfrm>
           <a:prstGeom prst="rect">
             <a:avLst/>
@@ -7138,7 +7138,7 @@
         </p:nvSpPr>
         <p:spPr>
           <a:xfrm>
-            <a:off x="11091672" y="6400800"/>
+            <a:off x="10865815" y="6400800"/>
             <a:ext cx="640080" cy="256032"/>
           </a:xfrm>
           <a:prstGeom prst="rect">
@@ -7177,12 +7177,12 @@
         </p:nvSpPr>
         <p:spPr>
           <a:xfrm>
-            <a:off x="457200" y="1783080"/>
-            <a:ext cx="3576218" cy="2788920"/>
+            <a:off x="685800" y="1691640"/>
+            <a:ext cx="3423818" cy="2514600"/>
           </a:xfrm>
           <a:prstGeom prst="roundRect">
             <a:avLst>
-              <a:gd name="adj" fmla="val 3934"/>
+              <a:gd name="adj" fmla="val 4364"/>
             </a:avLst>
           </a:prstGeom>
           <a:solidFill>
@@ -7204,7 +7204,7 @@
         </p:nvSpPr>
         <p:spPr>
           <a:xfrm>
-            <a:off x="731520" y="2002536"/>
+            <a:off x="1051560" y="2057400"/>
             <a:ext cx="457200" cy="457200"/>
           </a:xfrm>
           <a:prstGeom prst="roundRect">
@@ -7239,7 +7239,7 @@
         </p:blipFill>
         <p:spPr>
           <a:xfrm>
-            <a:off x="822960" y="2093976"/>
+            <a:off x="1143000" y="2148840"/>
             <a:ext cx="274320" cy="274320"/>
           </a:xfrm>
           <a:prstGeom prst="rect">
@@ -7255,8 +7255,8 @@
         </p:nvSpPr>
         <p:spPr>
           <a:xfrm>
-            <a:off x="1325880" y="2084832"/>
-            <a:ext cx="2433218" cy="274320"/>
+            <a:off x="1645920" y="2148840"/>
+            <a:ext cx="2097938" cy="274320"/>
           </a:xfrm>
           <a:prstGeom prst="rect">
             <a:avLst/>
@@ -7294,8 +7294,8 @@
         </p:nvSpPr>
         <p:spPr>
           <a:xfrm>
-            <a:off x="731520" y="2560320"/>
-            <a:ext cx="3027578" cy="777240"/>
+            <a:off x="1051560" y="2651760"/>
+            <a:ext cx="2692298" cy="731520"/>
           </a:xfrm>
           <a:prstGeom prst="rect">
             <a:avLst/>
@@ -7333,8 +7333,8 @@
         </p:nvSpPr>
         <p:spPr>
           <a:xfrm>
-            <a:off x="731520" y="3429000"/>
-            <a:ext cx="3027578" cy="1005840"/>
+            <a:off x="1051560" y="3429000"/>
+            <a:ext cx="2692298" cy="640080"/>
           </a:xfrm>
           <a:prstGeom prst="rect">
             <a:avLst/>
@@ -7352,13 +7352,13 @@
             <a:r>
               <a:rPr lang="en-US" sz="1350" dirty="0">
                 <a:solidFill>
-                  <a:srgbClr val="222731"/>
+                  <a:srgbClr val="63666A"/>
                 </a:solidFill>
                 <a:latin typeface="Hanken Grotesk" pitchFamily="34" charset="0"/>
                 <a:ea typeface="Hanken Grotesk" pitchFamily="34" charset="-122"/>
                 <a:cs typeface="Hanken Grotesk" pitchFamily="34" charset="-120"/>
               </a:rPr>
-              <a:t>Labore et dolore magna aliqua ut enim ad minim veniam quis nostrud exercitation ullamco laboris nisi.</a:t>
+              <a:t>Labore et dolore magna aliqua ut enim ad minim veniam quis nostrud.</a:t>
             </a:r>
             <a:endParaRPr lang="en-US" sz="1350" dirty="0"/>
           </a:p>
@@ -7372,12 +7372,12 @@
         </p:nvSpPr>
         <p:spPr>
           <a:xfrm>
-            <a:off x="4307738" y="1783080"/>
-            <a:ext cx="3576218" cy="2788920"/>
+            <a:off x="4383938" y="1691640"/>
+            <a:ext cx="3423818" cy="2514600"/>
           </a:xfrm>
           <a:prstGeom prst="roundRect">
             <a:avLst>
-              <a:gd name="adj" fmla="val 3934"/>
+              <a:gd name="adj" fmla="val 4364"/>
             </a:avLst>
           </a:prstGeom>
           <a:solidFill>
@@ -7399,7 +7399,7 @@
         </p:nvSpPr>
         <p:spPr>
           <a:xfrm>
-            <a:off x="4582058" y="2002536"/>
+            <a:off x="4749698" y="2057400"/>
             <a:ext cx="457200" cy="457200"/>
           </a:xfrm>
           <a:prstGeom prst="roundRect">
@@ -7434,7 +7434,7 @@
         </p:blipFill>
         <p:spPr>
           <a:xfrm>
-            <a:off x="4673498" y="2093976"/>
+            <a:off x="4841138" y="2148840"/>
             <a:ext cx="274320" cy="274320"/>
           </a:xfrm>
           <a:prstGeom prst="rect">
@@ -7450,8 +7450,8 @@
         </p:nvSpPr>
         <p:spPr>
           <a:xfrm>
-            <a:off x="5176418" y="2084832"/>
-            <a:ext cx="2433218" cy="274320"/>
+            <a:off x="5344058" y="2148840"/>
+            <a:ext cx="2097938" cy="274320"/>
           </a:xfrm>
           <a:prstGeom prst="rect">
             <a:avLst/>
@@ -7489,8 +7489,8 @@
         </p:nvSpPr>
         <p:spPr>
           <a:xfrm>
-            <a:off x="4582058" y="2560320"/>
-            <a:ext cx="3027578" cy="777240"/>
+            <a:off x="4749698" y="2651760"/>
+            <a:ext cx="2692298" cy="731520"/>
           </a:xfrm>
           <a:prstGeom prst="rect">
             <a:avLst/>
@@ -7528,8 +7528,8 @@
         </p:nvSpPr>
         <p:spPr>
           <a:xfrm>
-            <a:off x="4582058" y="3429000"/>
-            <a:ext cx="3027578" cy="1005840"/>
+            <a:off x="4749698" y="3429000"/>
+            <a:ext cx="2692298" cy="640080"/>
           </a:xfrm>
           <a:prstGeom prst="rect">
             <a:avLst/>
@@ -7547,13 +7547,13 @@
             <a:r>
               <a:rPr lang="en-US" sz="1350" dirty="0">
                 <a:solidFill>
-                  <a:srgbClr val="222731"/>
+                  <a:srgbClr val="63666A"/>
                 </a:solidFill>
                 <a:latin typeface="Hanken Grotesk" pitchFamily="34" charset="0"/>
                 <a:ea typeface="Hanken Grotesk" pitchFamily="34" charset="-122"/>
                 <a:cs typeface="Hanken Grotesk" pitchFamily="34" charset="-120"/>
               </a:rPr>
-              <a:t>Ad minim veniam quis nostrud exercitation ullamco laboris nisi ut aliquip ex ea commodo consequat duis.</a:t>
+              <a:t>Ad minim veniam quis nostrud exercitation ullamco laboris nisi ut aliquip ex.</a:t>
             </a:r>
             <a:endParaRPr lang="en-US" sz="1350" dirty="0"/>
           </a:p>
@@ -7567,12 +7567,12 @@
         </p:nvSpPr>
         <p:spPr>
           <a:xfrm>
-            <a:off x="8158277" y="1783080"/>
-            <a:ext cx="3576218" cy="2788920"/>
+            <a:off x="8082077" y="1691640"/>
+            <a:ext cx="3423818" cy="2514600"/>
           </a:xfrm>
           <a:prstGeom prst="roundRect">
             <a:avLst>
-              <a:gd name="adj" fmla="val 3934"/>
+              <a:gd name="adj" fmla="val 4364"/>
             </a:avLst>
           </a:prstGeom>
           <a:solidFill>
@@ -7594,7 +7594,7 @@
         </p:nvSpPr>
         <p:spPr>
           <a:xfrm>
-            <a:off x="8432597" y="2002536"/>
+            <a:off x="8447837" y="2057400"/>
             <a:ext cx="457200" cy="457200"/>
           </a:xfrm>
           <a:prstGeom prst="roundRect">
@@ -7629,7 +7629,7 @@
         </p:blipFill>
         <p:spPr>
           <a:xfrm>
-            <a:off x="8524037" y="2093976"/>
+            <a:off x="8539277" y="2148840"/>
             <a:ext cx="274320" cy="274320"/>
           </a:xfrm>
           <a:prstGeom prst="rect">
@@ -7645,8 +7645,8 @@
         </p:nvSpPr>
         <p:spPr>
           <a:xfrm>
-            <a:off x="9026957" y="2084832"/>
-            <a:ext cx="2433218" cy="274320"/>
+            <a:off x="9042197" y="2148840"/>
+            <a:ext cx="2097938" cy="274320"/>
           </a:xfrm>
           <a:prstGeom prst="rect">
             <a:avLst/>
@@ -7684,8 +7684,8 @@
         </p:nvSpPr>
         <p:spPr>
           <a:xfrm>
-            <a:off x="8432597" y="2560320"/>
-            <a:ext cx="3027578" cy="777240"/>
+            <a:off x="8447837" y="2651760"/>
+            <a:ext cx="2692298" cy="731520"/>
           </a:xfrm>
           <a:prstGeom prst="rect">
             <a:avLst/>
@@ -7723,8 +7723,8 @@
         </p:nvSpPr>
         <p:spPr>
           <a:xfrm>
-            <a:off x="8432597" y="3429000"/>
-            <a:ext cx="3027578" cy="1005840"/>
+            <a:off x="8447837" y="3429000"/>
+            <a:ext cx="2692298" cy="640080"/>
           </a:xfrm>
           <a:prstGeom prst="rect">
             <a:avLst/>
@@ -7742,13 +7742,13 @@
             <a:r>
               <a:rPr lang="en-US" sz="1350" dirty="0">
                 <a:solidFill>
-                  <a:srgbClr val="222731"/>
+                  <a:srgbClr val="63666A"/>
                 </a:solidFill>
                 <a:latin typeface="Hanken Grotesk" pitchFamily="34" charset="0"/>
                 <a:ea typeface="Hanken Grotesk" pitchFamily="34" charset="-122"/>
                 <a:cs typeface="Hanken Grotesk" pitchFamily="34" charset="-120"/>
               </a:rPr>
-              <a:t>Laboris nisi ut aliquip ex ea commodo consequat duis aute irure dolor in reprehenderit in voluptate.</a:t>
+              <a:t>Laboris nisi ut aliquip ex ea commodo consequat duis aute irure dolor.</a:t>
             </a:r>
             <a:endParaRPr lang="en-US" sz="1350" dirty="0"/>
           </a:p>
@@ -7762,12 +7762,12 @@
         </p:nvSpPr>
         <p:spPr>
           <a:xfrm>
-            <a:off x="457200" y="4846320"/>
-            <a:ext cx="11277295" cy="1234440"/>
+            <a:off x="685800" y="4480560"/>
+            <a:ext cx="10820095" cy="1143000"/>
           </a:xfrm>
           <a:prstGeom prst="roundRect">
             <a:avLst>
-              <a:gd name="adj" fmla="val 7407"/>
+              <a:gd name="adj" fmla="val 9600"/>
             </a:avLst>
           </a:prstGeom>
           <a:solidFill>
@@ -7789,12 +7789,12 @@
         </p:nvSpPr>
         <p:spPr>
           <a:xfrm>
-            <a:off x="731520" y="5230368"/>
-            <a:ext cx="1188720" cy="457200"/>
+            <a:off x="1051560" y="4841748"/>
+            <a:ext cx="1188720" cy="420624"/>
           </a:xfrm>
           <a:prstGeom prst="roundRect">
             <a:avLst>
-              <a:gd name="adj" fmla="val 16000"/>
+              <a:gd name="adj" fmla="val 17391"/>
             </a:avLst>
           </a:prstGeom>
           <a:solidFill>
@@ -7816,8 +7816,8 @@
         </p:nvSpPr>
         <p:spPr>
           <a:xfrm>
-            <a:off x="731520" y="5230368"/>
-            <a:ext cx="1188720" cy="457200"/>
+            <a:off x="1051560" y="4841748"/>
+            <a:ext cx="1188720" cy="420624"/>
           </a:xfrm>
           <a:prstGeom prst="rect">
             <a:avLst/>
@@ -7855,8 +7855,8 @@
         </p:nvSpPr>
         <p:spPr>
           <a:xfrm>
-            <a:off x="2194560" y="4846320"/>
-            <a:ext cx="9052560" cy="1234440"/>
+            <a:off x="2514600" y="4480560"/>
+            <a:ext cx="8625535" cy="1143000"/>
           </a:xfrm>
           <a:prstGeom prst="rect">
             <a:avLst/>
@@ -7880,7 +7880,7 @@
                 <a:ea typeface="Hanken Grotesk" pitchFamily="34" charset="-122"/>
                 <a:cs typeface="Hanken Grotesk" pitchFamily="34" charset="-120"/>
               </a:rPr>
-              <a:t>Deserunt mollit anim id est laborum curabitur pretium tincidunt lacus nulla gravida orci a odio nullam varius turpis et commodo pharetra est.</a:t>
+              <a:t>Deserunt mollit anim id est laborum curabitur pretium tincidunt lacus nulla gravida orci a odio nullam.</a:t>
             </a:r>
             <a:endParaRPr lang="en-US" sz="1600" dirty="0"/>
           </a:p>
@@ -7926,8 +7926,8 @@
         </p:nvSpPr>
         <p:spPr>
           <a:xfrm>
-            <a:off x="457200" y="384048"/>
-            <a:ext cx="8961120" cy="274320"/>
+            <a:off x="685800" y="502920"/>
+            <a:ext cx="8595360" cy="274320"/>
           </a:xfrm>
           <a:prstGeom prst="rect">
             <a:avLst/>
@@ -7965,8 +7965,8 @@
         </p:nvSpPr>
         <p:spPr>
           <a:xfrm>
-            <a:off x="457200" y="676656"/>
-            <a:ext cx="11274552" cy="868680"/>
+            <a:off x="685800" y="804672"/>
+            <a:ext cx="10820095" cy="566928"/>
           </a:xfrm>
           <a:prstGeom prst="rect">
             <a:avLst/>
@@ -7985,7 +7985,7 @@
               <a:buNone/>
             </a:pPr>
             <a:r>
-              <a:rPr lang="en-US" sz="3000" b="1" dirty="0">
+              <a:rPr lang="en-US" sz="2800" b="1" dirty="0">
                 <a:solidFill>
                   <a:srgbClr val="222731"/>
                 </a:solidFill>
@@ -7993,9 +7993,9 @@
                 <a:ea typeface="Bricolage Grotesque" pitchFamily="34" charset="-122"/>
                 <a:cs typeface="Bricolage Grotesque" pitchFamily="34" charset="-120"/>
               </a:rPr>
-              <a:t>Laboris nisi ut aliquip ex ea commodo consequat duis aute</a:t>
-            </a:r>
-            <a:endParaRPr lang="en-US" sz="3000" dirty="0"/>
+              <a:t>Laboris nisi ut aliquip ex ea commodo</a:t>
+            </a:r>
+            <a:endParaRPr lang="en-US" sz="2800" dirty="0"/>
           </a:p>
         </p:txBody>
       </p:sp>
@@ -8007,7 +8007,7 @@
         </p:nvSpPr>
         <p:spPr>
           <a:xfrm>
-            <a:off x="457200" y="6400800"/>
+            <a:off x="685800" y="6400800"/>
             <a:ext cx="4389120" cy="256032"/>
           </a:xfrm>
           <a:prstGeom prst="rect">
@@ -8047,7 +8047,7 @@
         <p:spPr>
           <a:xfrm>
             <a:off x="4937760" y="6400800"/>
-            <a:ext cx="5943600" cy="256032"/>
+            <a:ext cx="5790895" cy="256032"/>
           </a:xfrm>
           <a:prstGeom prst="rect">
             <a:avLst/>
@@ -8085,7 +8085,7 @@
         </p:nvSpPr>
         <p:spPr>
           <a:xfrm>
-            <a:off x="11091672" y="6400800"/>
+            <a:off x="10865815" y="6400800"/>
             <a:ext cx="640080" cy="256032"/>
           </a:xfrm>
           <a:prstGeom prst="rect">
@@ -8124,12 +8124,12 @@
         </p:nvSpPr>
         <p:spPr>
           <a:xfrm>
-            <a:off x="457200" y="1783080"/>
-            <a:ext cx="5120640" cy="4343400"/>
+            <a:off x="685800" y="1691640"/>
+            <a:ext cx="4846320" cy="4069080"/>
           </a:xfrm>
           <a:prstGeom prst="roundRect">
             <a:avLst>
-              <a:gd name="adj" fmla="val 2526"/>
+              <a:gd name="adj" fmla="val 2697"/>
             </a:avLst>
           </a:prstGeom>
           <a:solidFill>
@@ -8151,7 +8151,7 @@
         </p:nvSpPr>
         <p:spPr>
           <a:xfrm>
-            <a:off x="822960" y="2148840"/>
+            <a:off x="1051560" y="2057400"/>
             <a:ext cx="548640" cy="548640"/>
           </a:xfrm>
           <a:prstGeom prst="roundRect">
@@ -8186,7 +8186,7 @@
         </p:blipFill>
         <p:spPr>
           <a:xfrm>
-            <a:off x="932688" y="2258568"/>
+            <a:off x="1161288" y="2167128"/>
             <a:ext cx="329184" cy="329184"/>
           </a:xfrm>
           <a:prstGeom prst="rect">
@@ -8202,8 +8202,8 @@
         </p:nvSpPr>
         <p:spPr>
           <a:xfrm>
-            <a:off x="822960" y="2926080"/>
-            <a:ext cx="4389120" cy="274320"/>
+            <a:off x="1051560" y="2834640"/>
+            <a:ext cx="4114800" cy="274320"/>
           </a:xfrm>
           <a:prstGeom prst="rect">
             <a:avLst/>
@@ -8241,8 +8241,8 @@
         </p:nvSpPr>
         <p:spPr>
           <a:xfrm>
-            <a:off x="822960" y="3246120"/>
-            <a:ext cx="4389120" cy="1371600"/>
+            <a:off x="1051560" y="3154680"/>
+            <a:ext cx="4114800" cy="1280160"/>
           </a:xfrm>
           <a:prstGeom prst="rect">
             <a:avLst/>
@@ -8258,7 +8258,7 @@
               <a:buNone/>
             </a:pPr>
             <a:r>
-              <a:rPr lang="en-US" sz="2200" b="1" dirty="0">
+              <a:rPr lang="en-US" sz="2100" b="1" dirty="0">
                 <a:solidFill>
                   <a:srgbClr val="FFFFFF"/>
                 </a:solidFill>
@@ -8266,9 +8266,9 @@
                 <a:ea typeface="Bricolage Grotesque" pitchFamily="34" charset="-122"/>
                 <a:cs typeface="Bricolage Grotesque" pitchFamily="34" charset="-120"/>
               </a:rPr>
-              <a:t>Ad minim veniam quis nostrud exercitation ullamco laboris nisi ut aliquip ex ea commodo.</a:t>
-            </a:r>
-            <a:endParaRPr lang="en-US" sz="2200" dirty="0"/>
+              <a:t>Ad minim veniam quis nostrud exercitation ullamco laboris.</a:t>
+            </a:r>
+            <a:endParaRPr lang="en-US" sz="2100" dirty="0"/>
           </a:p>
         </p:txBody>
       </p:sp>
@@ -8280,8 +8280,8 @@
         </p:nvSpPr>
         <p:spPr>
           <a:xfrm>
-            <a:off x="822960" y="4800600"/>
-            <a:ext cx="4389120" cy="274320"/>
+            <a:off x="1051560" y="4617720"/>
+            <a:ext cx="4114800" cy="274320"/>
           </a:xfrm>
           <a:prstGeom prst="rect">
             <a:avLst/>
@@ -8319,8 +8319,8 @@
         </p:nvSpPr>
         <p:spPr>
           <a:xfrm>
-            <a:off x="822960" y="5102352"/>
-            <a:ext cx="4389120" cy="868680"/>
+            <a:off x="1051560" y="4937760"/>
+            <a:ext cx="4114800" cy="731520"/>
           </a:xfrm>
           <a:prstGeom prst="rect">
             <a:avLst/>
@@ -8344,7 +8344,7 @@
                 <a:ea typeface="Hanken Grotesk" pitchFamily="34" charset="-122"/>
                 <a:cs typeface="Hanken Grotesk" pitchFamily="34" charset="-120"/>
               </a:rPr>
-              <a:t>Est eros bibendum elit nec luctus magna felis sollicitudin mauris integer in mauris eu nibh euismod gravida lorem.</a:t>
+              <a:t>Est eros bibendum elit nec luctus magna felis sollicitudin mauris integer in.</a:t>
             </a:r>
             <a:endParaRPr lang="en-US" sz="1350" dirty="0"/>
           </a:p>
@@ -8358,12 +8358,12 @@
         </p:nvSpPr>
         <p:spPr>
           <a:xfrm>
-            <a:off x="5897880" y="1783080"/>
-            <a:ext cx="5836615" cy="1335024"/>
+            <a:off x="5806440" y="1691640"/>
+            <a:ext cx="5699455" cy="1173480"/>
           </a:xfrm>
           <a:prstGeom prst="roundRect">
             <a:avLst>
-              <a:gd name="adj" fmla="val 8219"/>
+              <a:gd name="adj" fmla="val 9351"/>
             </a:avLst>
           </a:prstGeom>
           <a:solidFill>
@@ -8385,8 +8385,8 @@
         </p:nvSpPr>
         <p:spPr>
           <a:xfrm>
-            <a:off x="6172200" y="1965960"/>
-            <a:ext cx="2011680" cy="685800"/>
+            <a:off x="6172200" y="1856232"/>
+            <a:ext cx="1828800" cy="640080"/>
           </a:xfrm>
           <a:prstGeom prst="rect">
             <a:avLst/>
@@ -8402,7 +8402,7 @@
               <a:buNone/>
             </a:pPr>
             <a:r>
-              <a:rPr lang="en-US" sz="3200" b="1" dirty="0">
+              <a:rPr lang="en-US" sz="3000" b="1" dirty="0">
                 <a:solidFill>
                   <a:srgbClr val="2E4AED"/>
                 </a:solidFill>
@@ -8412,7 +8412,7 @@
               </a:rPr>
               <a:t>1 in 3</a:t>
             </a:r>
-            <a:endParaRPr lang="en-US" sz="3200" dirty="0"/>
+            <a:endParaRPr lang="en-US" sz="3000" dirty="0"/>
           </a:p>
         </p:txBody>
       </p:sp>
@@ -8424,8 +8424,8 @@
         </p:nvSpPr>
         <p:spPr>
           <a:xfrm>
-            <a:off x="8275320" y="1984248"/>
-            <a:ext cx="3291840" cy="640080"/>
+            <a:off x="8183880" y="1856232"/>
+            <a:ext cx="2956255" cy="640080"/>
           </a:xfrm>
           <a:prstGeom prst="rect">
             <a:avLst/>
@@ -8449,7 +8449,7 @@
                 <a:ea typeface="Hanken Grotesk" pitchFamily="34" charset="-122"/>
                 <a:cs typeface="Hanken Grotesk" pitchFamily="34" charset="-120"/>
               </a:rPr>
-              <a:t>Laboris nisi ut aliquip ex ea commodo.</a:t>
+              <a:t>Laboris nisi ut aliquip ex ea.</a:t>
             </a:r>
             <a:endParaRPr lang="en-US" sz="1350" dirty="0"/>
           </a:p>
@@ -8463,8 +8463,8 @@
         </p:nvSpPr>
         <p:spPr>
           <a:xfrm>
-            <a:off x="6172200" y="2724912"/>
-            <a:ext cx="5394960" cy="274320"/>
+            <a:off x="6172200" y="2481072"/>
+            <a:ext cx="4967935" cy="256032"/>
           </a:xfrm>
           <a:prstGeom prst="rect">
             <a:avLst/>
@@ -8502,12 +8502,12 @@
         </p:nvSpPr>
         <p:spPr>
           <a:xfrm>
-            <a:off x="5897880" y="3264408"/>
-            <a:ext cx="5836615" cy="1335024"/>
+            <a:off x="5806440" y="3139440"/>
+            <a:ext cx="5699455" cy="1173480"/>
           </a:xfrm>
           <a:prstGeom prst="roundRect">
             <a:avLst>
-              <a:gd name="adj" fmla="val 8219"/>
+              <a:gd name="adj" fmla="val 9351"/>
             </a:avLst>
           </a:prstGeom>
           <a:solidFill>
@@ -8529,8 +8529,8 @@
         </p:nvSpPr>
         <p:spPr>
           <a:xfrm>
-            <a:off x="6172200" y="3447288"/>
-            <a:ext cx="2011680" cy="685800"/>
+            <a:off x="6172200" y="3304032"/>
+            <a:ext cx="1828800" cy="640080"/>
           </a:xfrm>
           <a:prstGeom prst="rect">
             <a:avLst/>
@@ -8546,7 +8546,7 @@
               <a:buNone/>
             </a:pPr>
             <a:r>
-              <a:rPr lang="en-US" sz="3200" b="1" dirty="0">
+              <a:rPr lang="en-US" sz="3000" b="1" dirty="0">
                 <a:solidFill>
                   <a:srgbClr val="2E4AED"/>
                 </a:solidFill>
@@ -8556,7 +8556,7 @@
               </a:rPr>
               <a:t>62%</a:t>
             </a:r>
-            <a:endParaRPr lang="en-US" sz="3200" dirty="0"/>
+            <a:endParaRPr lang="en-US" sz="3000" dirty="0"/>
           </a:p>
         </p:txBody>
       </p:sp>
@@ -8568,8 +8568,8 @@
         </p:nvSpPr>
         <p:spPr>
           <a:xfrm>
-            <a:off x="8275320" y="3465576"/>
-            <a:ext cx="3291840" cy="640080"/>
+            <a:off x="8183880" y="3304032"/>
+            <a:ext cx="2956255" cy="640080"/>
           </a:xfrm>
           <a:prstGeom prst="rect">
             <a:avLst/>
@@ -8593,7 +8593,7 @@
                 <a:ea typeface="Hanken Grotesk" pitchFamily="34" charset="-122"/>
                 <a:cs typeface="Hanken Grotesk" pitchFamily="34" charset="-120"/>
               </a:rPr>
-              <a:t>Deserunt mollit anim id est laborum curabitur.</a:t>
+              <a:t>Deserunt mollit anim id est laborum.</a:t>
             </a:r>
             <a:endParaRPr lang="en-US" sz="1350" dirty="0"/>
           </a:p>
@@ -8607,8 +8607,8 @@
         </p:nvSpPr>
         <p:spPr>
           <a:xfrm>
-            <a:off x="6172200" y="4206240"/>
-            <a:ext cx="5394960" cy="274320"/>
+            <a:off x="6172200" y="3928872"/>
+            <a:ext cx="4967935" cy="256032"/>
           </a:xfrm>
           <a:prstGeom prst="rect">
             <a:avLst/>
@@ -8646,12 +8646,12 @@
         </p:nvSpPr>
         <p:spPr>
           <a:xfrm>
-            <a:off x="5897880" y="4745736"/>
-            <a:ext cx="5836615" cy="1335024"/>
+            <a:off x="5806440" y="4587240"/>
+            <a:ext cx="5699455" cy="1173480"/>
           </a:xfrm>
           <a:prstGeom prst="roundRect">
             <a:avLst>
-              <a:gd name="adj" fmla="val 8219"/>
+              <a:gd name="adj" fmla="val 9351"/>
             </a:avLst>
           </a:prstGeom>
           <a:solidFill>
@@ -8673,8 +8673,8 @@
         </p:nvSpPr>
         <p:spPr>
           <a:xfrm>
-            <a:off x="6172200" y="4928616"/>
-            <a:ext cx="2011680" cy="685800"/>
+            <a:off x="6172200" y="4751832"/>
+            <a:ext cx="1828800" cy="640080"/>
           </a:xfrm>
           <a:prstGeom prst="rect">
             <a:avLst/>
@@ -8690,7 +8690,7 @@
               <a:buNone/>
             </a:pPr>
             <a:r>
-              <a:rPr lang="en-US" sz="3200" b="1" dirty="0">
+              <a:rPr lang="en-US" sz="3000" b="1" dirty="0">
                 <a:solidFill>
                   <a:srgbClr val="2E4AED"/>
                 </a:solidFill>
@@ -8700,7 +8700,7 @@
               </a:rPr>
               <a:t>5 steps</a:t>
             </a:r>
-            <a:endParaRPr lang="en-US" sz="3200" dirty="0"/>
+            <a:endParaRPr lang="en-US" sz="3000" dirty="0"/>
           </a:p>
         </p:txBody>
       </p:sp>
@@ -8712,8 +8712,8 @@
         </p:nvSpPr>
         <p:spPr>
           <a:xfrm>
-            <a:off x="8275320" y="4946904"/>
-            <a:ext cx="3291840" cy="640080"/>
+            <a:off x="8183880" y="4751832"/>
+            <a:ext cx="2956255" cy="640080"/>
           </a:xfrm>
           <a:prstGeom prst="rect">
             <a:avLst/>
@@ -8737,7 +8737,7 @@
                 <a:ea typeface="Hanken Grotesk" pitchFamily="34" charset="-122"/>
                 <a:cs typeface="Hanken Grotesk" pitchFamily="34" charset="-120"/>
               </a:rPr>
-              <a:t>Nibh euismod gravida lorem ipsum dolor sit.</a:t>
+              <a:t>Nibh euismod gravida lorem ipsum dolor.</a:t>
             </a:r>
             <a:endParaRPr lang="en-US" sz="1350" dirty="0"/>
           </a:p>
@@ -8751,8 +8751,8 @@
         </p:nvSpPr>
         <p:spPr>
           <a:xfrm>
-            <a:off x="6172200" y="5687568"/>
-            <a:ext cx="5394960" cy="274320"/>
+            <a:off x="6172200" y="5376672"/>
+            <a:ext cx="4967935" cy="256032"/>
           </a:xfrm>
           <a:prstGeom prst="rect">
             <a:avLst/>
@@ -8822,8 +8822,8 @@
         </p:nvSpPr>
         <p:spPr>
           <a:xfrm>
-            <a:off x="457200" y="384048"/>
-            <a:ext cx="8961120" cy="274320"/>
+            <a:off x="685800" y="502920"/>
+            <a:ext cx="8595360" cy="274320"/>
           </a:xfrm>
           <a:prstGeom prst="rect">
             <a:avLst/>
@@ -8861,8 +8861,8 @@
         </p:nvSpPr>
         <p:spPr>
           <a:xfrm>
-            <a:off x="457200" y="676656"/>
-            <a:ext cx="11274552" cy="868680"/>
+            <a:off x="685800" y="804672"/>
+            <a:ext cx="10820095" cy="566928"/>
           </a:xfrm>
           <a:prstGeom prst="rect">
             <a:avLst/>
@@ -8881,7 +8881,7 @@
               <a:buNone/>
             </a:pPr>
             <a:r>
-              <a:rPr lang="en-US" sz="3000" b="1" dirty="0">
+              <a:rPr lang="en-US" sz="2800" b="1" dirty="0">
                 <a:solidFill>
                   <a:srgbClr val="222731"/>
                 </a:solidFill>
@@ -8889,9 +8889,9 @@
                 <a:ea typeface="Bricolage Grotesque" pitchFamily="34" charset="-122"/>
                 <a:cs typeface="Bricolage Grotesque" pitchFamily="34" charset="-120"/>
               </a:rPr>
-              <a:t>Lorem ipsum hypothesis stated as one testable sentence</a:t>
-            </a:r>
-            <a:endParaRPr lang="en-US" sz="3000" dirty="0"/>
+              <a:t>Lorem ipsum hypothesis as one testable sentence</a:t>
+            </a:r>
+            <a:endParaRPr lang="en-US" sz="2800" dirty="0"/>
           </a:p>
         </p:txBody>
       </p:sp>
@@ -8903,7 +8903,7 @@
         </p:nvSpPr>
         <p:spPr>
           <a:xfrm>
-            <a:off x="457200" y="6400800"/>
+            <a:off x="685800" y="6400800"/>
             <a:ext cx="4389120" cy="256032"/>
           </a:xfrm>
           <a:prstGeom prst="rect">
@@ -8943,7 +8943,7 @@
         <p:spPr>
           <a:xfrm>
             <a:off x="4937760" y="6400800"/>
-            <a:ext cx="5943600" cy="256032"/>
+            <a:ext cx="5790895" cy="256032"/>
           </a:xfrm>
           <a:prstGeom prst="rect">
             <a:avLst/>
@@ -8981,7 +8981,7 @@
         </p:nvSpPr>
         <p:spPr>
           <a:xfrm>
-            <a:off x="11091672" y="6400800"/>
+            <a:off x="10865815" y="6400800"/>
             <a:ext cx="640080" cy="256032"/>
           </a:xfrm>
           <a:prstGeom prst="rect">
@@ -9020,12 +9020,12 @@
         </p:nvSpPr>
         <p:spPr>
           <a:xfrm>
-            <a:off x="457200" y="1783080"/>
-            <a:ext cx="11277295" cy="3291840"/>
+            <a:off x="685800" y="1691640"/>
+            <a:ext cx="10820095" cy="2697480"/>
           </a:xfrm>
           <a:prstGeom prst="roundRect">
             <a:avLst>
-              <a:gd name="adj" fmla="val 3889"/>
+              <a:gd name="adj" fmla="val 4746"/>
             </a:avLst>
           </a:prstGeom>
           <a:solidFill>
@@ -9047,7 +9047,7 @@
         </p:nvSpPr>
         <p:spPr>
           <a:xfrm>
-            <a:off x="868680" y="2148840"/>
+            <a:off x="1143000" y="2103120"/>
             <a:ext cx="1554480" cy="310896"/>
           </a:xfrm>
           <a:prstGeom prst="roundRect">
@@ -9074,7 +9074,7 @@
         </p:nvSpPr>
         <p:spPr>
           <a:xfrm>
-            <a:off x="868680" y="2148840"/>
+            <a:off x="1143000" y="2103120"/>
             <a:ext cx="1554480" cy="310896"/>
           </a:xfrm>
           <a:prstGeom prst="rect">
@@ -9113,8 +9113,8 @@
         </p:nvSpPr>
         <p:spPr>
           <a:xfrm>
-            <a:off x="868680" y="2651760"/>
-            <a:ext cx="10454335" cy="2103120"/>
+            <a:off x="1143000" y="2560320"/>
+            <a:ext cx="9905695" cy="1508760"/>
           </a:xfrm>
           <a:prstGeom prst="rect">
             <a:avLst/>
@@ -9130,7 +9130,7 @@
               <a:buNone/>
             </a:pPr>
             <a:r>
-              <a:rPr lang="en-US" sz="3000" b="1" dirty="0">
+              <a:rPr lang="en-US" sz="2800" b="1" dirty="0">
                 <a:solidFill>
                   <a:srgbClr val="FFFFFF"/>
                 </a:solidFill>
@@ -9138,9 +9138,9 @@
                 <a:ea typeface="Bricolage Grotesque" pitchFamily="34" charset="-122"/>
                 <a:cs typeface="Bricolage Grotesque" pitchFamily="34" charset="-120"/>
               </a:rPr>
-              <a:t>We believe that laboris nisi ut aliquip ex ea commodo consequat duis aute will est eros bibendum elit nec luctus magna felis.</a:t>
-            </a:r>
-            <a:endParaRPr lang="en-US" sz="3000" dirty="0"/>
+              <a:t>We believe that laboris nisi ut aliquip ex ea commodo consequat will est eros bibendum elit nec luctus.</a:t>
+            </a:r>
+            <a:endParaRPr lang="en-US" sz="2800" dirty="0"/>
           </a:p>
         </p:txBody>
       </p:sp>
@@ -9152,8 +9152,8 @@
         </p:nvSpPr>
         <p:spPr>
           <a:xfrm>
-            <a:off x="457200" y="5303520"/>
-            <a:ext cx="3576218" cy="274320"/>
+            <a:off x="685800" y="4754880"/>
+            <a:ext cx="3423818" cy="274320"/>
           </a:xfrm>
           <a:prstGeom prst="rect">
             <a:avLst/>
@@ -9191,8 +9191,8 @@
         </p:nvSpPr>
         <p:spPr>
           <a:xfrm>
-            <a:off x="457200" y="5577840"/>
-            <a:ext cx="3576218" cy="731520"/>
+            <a:off x="685800" y="5047488"/>
+            <a:ext cx="3423818" cy="713232"/>
           </a:xfrm>
           <a:prstGeom prst="rect">
             <a:avLst/>
@@ -9216,7 +9216,7 @@
                 <a:ea typeface="Hanken Grotesk" pitchFamily="34" charset="-122"/>
                 <a:cs typeface="Hanken Grotesk" pitchFamily="34" charset="-120"/>
               </a:rPr>
-              <a:t>Dolor in reprehenderit in voluptate velit esse cillum dolore eu fugiat nulla pariatur excepteur.</a:t>
+              <a:t>Dolor in reprehenderit in voluptate velit esse cillum dolore eu.</a:t>
             </a:r>
             <a:endParaRPr lang="en-US" sz="1350" dirty="0"/>
           </a:p>
@@ -9230,8 +9230,8 @@
         </p:nvSpPr>
         <p:spPr>
           <a:xfrm>
-            <a:off x="4307738" y="5303520"/>
-            <a:ext cx="3576218" cy="274320"/>
+            <a:off x="4383938" y="4754880"/>
+            <a:ext cx="3423818" cy="274320"/>
           </a:xfrm>
           <a:prstGeom prst="rect">
             <a:avLst/>
@@ -9269,8 +9269,8 @@
         </p:nvSpPr>
         <p:spPr>
           <a:xfrm>
-            <a:off x="4307738" y="5577840"/>
-            <a:ext cx="3576218" cy="731520"/>
+            <a:off x="4383938" y="5047488"/>
+            <a:ext cx="3423818" cy="713232"/>
           </a:xfrm>
           <a:prstGeom prst="rect">
             <a:avLst/>
@@ -9308,8 +9308,8 @@
         </p:nvSpPr>
         <p:spPr>
           <a:xfrm>
-            <a:off x="8158277" y="5303520"/>
-            <a:ext cx="3576218" cy="274320"/>
+            <a:off x="8082077" y="4754880"/>
+            <a:ext cx="3423818" cy="274320"/>
           </a:xfrm>
           <a:prstGeom prst="rect">
             <a:avLst/>
@@ -9347,8 +9347,8 @@
         </p:nvSpPr>
         <p:spPr>
           <a:xfrm>
-            <a:off x="8158277" y="5577840"/>
-            <a:ext cx="3576218" cy="731520"/>
+            <a:off x="8082077" y="5047488"/>
+            <a:ext cx="3423818" cy="713232"/>
           </a:xfrm>
           <a:prstGeom prst="rect">
             <a:avLst/>
@@ -9372,7 +9372,7 @@
                 <a:ea typeface="Hanken Grotesk" pitchFamily="34" charset="-122"/>
                 <a:cs typeface="Hanken Grotesk" pitchFamily="34" charset="-120"/>
               </a:rPr>
-              <a:t>Sed do eiusmod tempor incididunt ut labore et.</a:t>
+              <a:t>Sed do eiusmod tempor incididunt ut labore.</a:t>
             </a:r>
             <a:endParaRPr lang="en-US" sz="1350" dirty="0"/>
           </a:p>
@@ -9418,8 +9418,8 @@
         </p:nvSpPr>
         <p:spPr>
           <a:xfrm>
-            <a:off x="457200" y="384048"/>
-            <a:ext cx="8961120" cy="274320"/>
+            <a:off x="685800" y="502920"/>
+            <a:ext cx="8595360" cy="274320"/>
           </a:xfrm>
           <a:prstGeom prst="rect">
             <a:avLst/>
@@ -9457,8 +9457,8 @@
         </p:nvSpPr>
         <p:spPr>
           <a:xfrm>
-            <a:off x="457200" y="676656"/>
-            <a:ext cx="11274552" cy="868680"/>
+            <a:off x="685800" y="804672"/>
+            <a:ext cx="10820095" cy="566928"/>
           </a:xfrm>
           <a:prstGeom prst="rect">
             <a:avLst/>
@@ -9477,7 +9477,7 @@
               <a:buNone/>
             </a:pPr>
             <a:r>
-              <a:rPr lang="en-US" sz="3000" b="1" dirty="0">
+              <a:rPr lang="en-US" sz="2800" b="1" dirty="0">
                 <a:solidFill>
                   <a:srgbClr val="222731"/>
                 </a:solidFill>
@@ -9485,9 +9485,9 @@
                 <a:ea typeface="Bricolage Grotesque" pitchFamily="34" charset="-122"/>
                 <a:cs typeface="Bricolage Grotesque" pitchFamily="34" charset="-120"/>
               </a:rPr>
-              <a:t>Pretium tincidunt lacus nulla gravida orci a odio nullam</a:t>
-            </a:r>
-            <a:endParaRPr lang="en-US" sz="3000" dirty="0"/>
+              <a:t>Pretium tincidunt lacus nulla gravida orci a</a:t>
+            </a:r>
+            <a:endParaRPr lang="en-US" sz="2800" dirty="0"/>
           </a:p>
         </p:txBody>
       </p:sp>
@@ -9499,7 +9499,7 @@
         </p:nvSpPr>
         <p:spPr>
           <a:xfrm>
-            <a:off x="457200" y="6400800"/>
+            <a:off x="685800" y="6400800"/>
             <a:ext cx="4389120" cy="256032"/>
           </a:xfrm>
           <a:prstGeom prst="rect">
@@ -9539,7 +9539,7 @@
         <p:spPr>
           <a:xfrm>
             <a:off x="4937760" y="6400800"/>
-            <a:ext cx="5943600" cy="256032"/>
+            <a:ext cx="5790895" cy="256032"/>
           </a:xfrm>
           <a:prstGeom prst="rect">
             <a:avLst/>
@@ -9577,7 +9577,7 @@
         </p:nvSpPr>
         <p:spPr>
           <a:xfrm>
-            <a:off x="11091672" y="6400800"/>
+            <a:off x="10865815" y="6400800"/>
             <a:ext cx="640080" cy="256032"/>
           </a:xfrm>
           <a:prstGeom prst="rect">
@@ -9616,8 +9616,8 @@
         </p:nvSpPr>
         <p:spPr>
           <a:xfrm>
-            <a:off x="1188720" y="2514600"/>
-            <a:ext cx="9814255" cy="0"/>
+            <a:off x="1600200" y="2194560"/>
+            <a:ext cx="8991295" cy="0"/>
           </a:xfrm>
           <a:prstGeom prst="line">
             <a:avLst/>
@@ -9639,7 +9639,7 @@
         </p:nvSpPr>
         <p:spPr>
           <a:xfrm>
-            <a:off x="914400" y="2240280"/>
+            <a:off x="1325880" y="1920240"/>
             <a:ext cx="548640" cy="548640"/>
           </a:xfrm>
           <a:prstGeom prst="ellipse">
@@ -9664,7 +9664,7 @@
         </p:nvSpPr>
         <p:spPr>
           <a:xfrm>
-            <a:off x="914400" y="2240280"/>
+            <a:off x="1325880" y="1920240"/>
             <a:ext cx="548640" cy="548640"/>
           </a:xfrm>
           <a:prstGeom prst="rect">
@@ -9703,8 +9703,8 @@
         </p:nvSpPr>
         <p:spPr>
           <a:xfrm>
-            <a:off x="182880" y="2971800"/>
-            <a:ext cx="2011680" cy="320040"/>
+            <a:off x="640080" y="2697480"/>
+            <a:ext cx="1920240" cy="320040"/>
           </a:xfrm>
           <a:prstGeom prst="rect">
             <a:avLst/>
@@ -9742,8 +9742,8 @@
         </p:nvSpPr>
         <p:spPr>
           <a:xfrm>
-            <a:off x="182880" y="3319272"/>
-            <a:ext cx="2011680" cy="914400"/>
+            <a:off x="640080" y="3063240"/>
+            <a:ext cx="1920240" cy="822960"/>
           </a:xfrm>
           <a:prstGeom prst="rect">
             <a:avLst/>
@@ -9767,7 +9767,7 @@
                 <a:ea typeface="Hanken Grotesk" pitchFamily="34" charset="-122"/>
                 <a:cs typeface="Hanken Grotesk" pitchFamily="34" charset="-120"/>
               </a:rPr>
-              <a:t>Consequat duis aute irure dolor in reprehenderit in voluptate.</a:t>
+              <a:t>Consequat duis aute irure dolor in reprehenderit.</a:t>
             </a:r>
             <a:endParaRPr lang="en-US" sz="1150" dirty="0"/>
           </a:p>
@@ -9781,7 +9781,7 @@
         </p:nvSpPr>
         <p:spPr>
           <a:xfrm>
-            <a:off x="3367964" y="2240280"/>
+            <a:off x="3573704" y="1920240"/>
             <a:ext cx="548640" cy="548640"/>
           </a:xfrm>
           <a:prstGeom prst="ellipse">
@@ -9806,7 +9806,7 @@
         </p:nvSpPr>
         <p:spPr>
           <a:xfrm>
-            <a:off x="3367964" y="2240280"/>
+            <a:off x="3573704" y="1920240"/>
             <a:ext cx="548640" cy="548640"/>
           </a:xfrm>
           <a:prstGeom prst="rect">
@@ -9845,8 +9845,8 @@
         </p:nvSpPr>
         <p:spPr>
           <a:xfrm>
-            <a:off x="2636444" y="2971800"/>
-            <a:ext cx="2011680" cy="320040"/>
+            <a:off x="2887904" y="2697480"/>
+            <a:ext cx="1920240" cy="320040"/>
           </a:xfrm>
           <a:prstGeom prst="rect">
             <a:avLst/>
@@ -9884,8 +9884,8 @@
         </p:nvSpPr>
         <p:spPr>
           <a:xfrm>
-            <a:off x="2636444" y="3319272"/>
-            <a:ext cx="2011680" cy="914400"/>
+            <a:off x="2887904" y="3063240"/>
+            <a:ext cx="1920240" cy="822960"/>
           </a:xfrm>
           <a:prstGeom prst="rect">
             <a:avLst/>
@@ -9909,7 +9909,7 @@
                 <a:ea typeface="Hanken Grotesk" pitchFamily="34" charset="-122"/>
                 <a:cs typeface="Hanken Grotesk" pitchFamily="34" charset="-120"/>
               </a:rPr>
-              <a:t>Non proident sunt in culpa qui officia deserunt mollit.</a:t>
+              <a:t>Non proident sunt in culpa qui officia.</a:t>
             </a:r>
             <a:endParaRPr lang="en-US" sz="1150" dirty="0"/>
           </a:p>
@@ -9923,7 +9923,7 @@
         </p:nvSpPr>
         <p:spPr>
           <a:xfrm>
-            <a:off x="5821528" y="2240280"/>
+            <a:off x="5821528" y="1920240"/>
             <a:ext cx="548640" cy="548640"/>
           </a:xfrm>
           <a:prstGeom prst="ellipse">
@@ -9948,7 +9948,7 @@
         </p:nvSpPr>
         <p:spPr>
           <a:xfrm>
-            <a:off x="5821528" y="2240280"/>
+            <a:off x="5821528" y="1920240"/>
             <a:ext cx="548640" cy="548640"/>
           </a:xfrm>
           <a:prstGeom prst="rect">
@@ -9987,8 +9987,8 @@
         </p:nvSpPr>
         <p:spPr>
           <a:xfrm>
-            <a:off x="5090008" y="2971800"/>
-            <a:ext cx="2011680" cy="320040"/>
+            <a:off x="5135728" y="2697480"/>
+            <a:ext cx="1920240" cy="320040"/>
           </a:xfrm>
           <a:prstGeom prst="rect">
             <a:avLst/>
@@ -10026,8 +10026,8 @@
         </p:nvSpPr>
         <p:spPr>
           <a:xfrm>
-            <a:off x="5090008" y="3319272"/>
-            <a:ext cx="2011680" cy="914400"/>
+            <a:off x="5135728" y="3063240"/>
+            <a:ext cx="1920240" cy="822960"/>
           </a:xfrm>
           <a:prstGeom prst="rect">
             <a:avLst/>
@@ -10051,7 +10051,7 @@
                 <a:ea typeface="Hanken Grotesk" pitchFamily="34" charset="-122"/>
                 <a:cs typeface="Hanken Grotesk" pitchFamily="34" charset="-120"/>
               </a:rPr>
-              <a:t>Odio nullam varius turpis et commodo pharetra est eros.</a:t>
+              <a:t>Odio nullam varius turpis et commodo pharetra.</a:t>
             </a:r>
             <a:endParaRPr lang="en-US" sz="1150" dirty="0"/>
           </a:p>
@@ -10065,7 +10065,7 @@
         </p:nvSpPr>
         <p:spPr>
           <a:xfrm>
-            <a:off x="8275091" y="2240280"/>
+            <a:off x="8069351" y="1920240"/>
             <a:ext cx="548640" cy="548640"/>
           </a:xfrm>
           <a:prstGeom prst="ellipse">
@@ -10090,7 +10090,7 @@
         </p:nvSpPr>
         <p:spPr>
           <a:xfrm>
-            <a:off x="8275091" y="2240280"/>
+            <a:off x="8069351" y="1920240"/>
             <a:ext cx="548640" cy="548640"/>
           </a:xfrm>
           <a:prstGeom prst="rect">
@@ -10129,8 +10129,8 @@
         </p:nvSpPr>
         <p:spPr>
           <a:xfrm>
-            <a:off x="7543571" y="2971800"/>
-            <a:ext cx="2011680" cy="320040"/>
+            <a:off x="7383551" y="2697480"/>
+            <a:ext cx="1920240" cy="320040"/>
           </a:xfrm>
           <a:prstGeom prst="rect">
             <a:avLst/>
@@ -10168,8 +10168,8 @@
         </p:nvSpPr>
         <p:spPr>
           <a:xfrm>
-            <a:off x="7543571" y="3319272"/>
-            <a:ext cx="2011680" cy="914400"/>
+            <a:off x="7383551" y="3063240"/>
+            <a:ext cx="1920240" cy="822960"/>
           </a:xfrm>
           <a:prstGeom prst="rect">
             <a:avLst/>
@@ -10193,7 +10193,7 @@
                 <a:ea typeface="Hanken Grotesk" pitchFamily="34" charset="-122"/>
                 <a:cs typeface="Hanken Grotesk" pitchFamily="34" charset="-120"/>
               </a:rPr>
-              <a:t>Nibh euismod gravida lorem ipsum dolor sit amet consectetur.</a:t>
+              <a:t>Nibh euismod gravida lorem ipsum dolor sit.</a:t>
             </a:r>
             <a:endParaRPr lang="en-US" sz="1150" dirty="0"/>
           </a:p>
@@ -10207,7 +10207,7 @@
         </p:nvSpPr>
         <p:spPr>
           <a:xfrm>
-            <a:off x="10728655" y="2240280"/>
+            <a:off x="10317175" y="1920240"/>
             <a:ext cx="548640" cy="548640"/>
           </a:xfrm>
           <a:prstGeom prst="ellipse">
@@ -10232,7 +10232,7 @@
         </p:nvSpPr>
         <p:spPr>
           <a:xfrm>
-            <a:off x="10728655" y="2240280"/>
+            <a:off x="10317175" y="1920240"/>
             <a:ext cx="548640" cy="548640"/>
           </a:xfrm>
           <a:prstGeom prst="rect">
@@ -10271,8 +10271,8 @@
         </p:nvSpPr>
         <p:spPr>
           <a:xfrm>
-            <a:off x="9997135" y="2971800"/>
-            <a:ext cx="2011680" cy="320040"/>
+            <a:off x="9631375" y="2697480"/>
+            <a:ext cx="1920240" cy="320040"/>
           </a:xfrm>
           <a:prstGeom prst="rect">
             <a:avLst/>
@@ -10310,8 +10310,8 @@
         </p:nvSpPr>
         <p:spPr>
           <a:xfrm>
-            <a:off x="9997135" y="3319272"/>
-            <a:ext cx="2011680" cy="914400"/>
+            <a:off x="9631375" y="3063240"/>
+            <a:ext cx="1920240" cy="822960"/>
           </a:xfrm>
           <a:prstGeom prst="rect">
             <a:avLst/>
@@ -10335,7 +10335,7 @@
                 <a:ea typeface="Hanken Grotesk" pitchFamily="34" charset="-122"/>
                 <a:cs typeface="Hanken Grotesk" pitchFamily="34" charset="-120"/>
               </a:rPr>
-              <a:t>Aliqua ut enim ad minim veniam quis nostrud exercitation.</a:t>
+              <a:t>Aliqua ut enim ad minim veniam quis.</a:t>
             </a:r>
             <a:endParaRPr lang="en-US" sz="1150" dirty="0"/>
           </a:p>
@@ -10349,12 +10349,12 @@
         </p:nvSpPr>
         <p:spPr>
           <a:xfrm>
-            <a:off x="457200" y="4617720"/>
-            <a:ext cx="11277295" cy="1508760"/>
+            <a:off x="685800" y="4526280"/>
+            <a:ext cx="10820095" cy="1234440"/>
           </a:xfrm>
           <a:prstGeom prst="roundRect">
             <a:avLst>
-              <a:gd name="adj" fmla="val 7273"/>
+              <a:gd name="adj" fmla="val 8889"/>
             </a:avLst>
           </a:prstGeom>
           <a:solidFill>
@@ -10376,8 +10376,8 @@
         </p:nvSpPr>
         <p:spPr>
           <a:xfrm>
-            <a:off x="731520" y="4892040"/>
-            <a:ext cx="1962851" cy="274320"/>
+            <a:off x="1051560" y="4818888"/>
+            <a:ext cx="1834835" cy="274320"/>
           </a:xfrm>
           <a:prstGeom prst="rect">
             <a:avLst/>
@@ -10415,8 +10415,8 @@
         </p:nvSpPr>
         <p:spPr>
           <a:xfrm>
-            <a:off x="731520" y="5212080"/>
-            <a:ext cx="1962851" cy="640080"/>
+            <a:off x="1051560" y="5120640"/>
+            <a:ext cx="1834835" cy="411480"/>
           </a:xfrm>
           <a:prstGeom prst="rect">
             <a:avLst/>
@@ -10454,8 +10454,8 @@
         </p:nvSpPr>
         <p:spPr>
           <a:xfrm>
-            <a:off x="2877251" y="4892040"/>
-            <a:ext cx="1962851" cy="274320"/>
+            <a:off x="3069275" y="4818888"/>
+            <a:ext cx="1834835" cy="274320"/>
           </a:xfrm>
           <a:prstGeom prst="rect">
             <a:avLst/>
@@ -10493,8 +10493,8 @@
         </p:nvSpPr>
         <p:spPr>
           <a:xfrm>
-            <a:off x="2877251" y="5212080"/>
-            <a:ext cx="1962851" cy="640080"/>
+            <a:off x="3069275" y="5120640"/>
+            <a:ext cx="1834835" cy="411480"/>
           </a:xfrm>
           <a:prstGeom prst="rect">
             <a:avLst/>
@@ -10532,8 +10532,8 @@
         </p:nvSpPr>
         <p:spPr>
           <a:xfrm>
-            <a:off x="5022982" y="4892040"/>
-            <a:ext cx="1962851" cy="274320"/>
+            <a:off x="5086990" y="4818888"/>
+            <a:ext cx="1834835" cy="274320"/>
           </a:xfrm>
           <a:prstGeom prst="rect">
             <a:avLst/>
@@ -10571,8 +10571,8 @@
         </p:nvSpPr>
         <p:spPr>
           <a:xfrm>
-            <a:off x="5022982" y="5212080"/>
-            <a:ext cx="1962851" cy="640080"/>
+            <a:off x="5086990" y="5120640"/>
+            <a:ext cx="1834835" cy="411480"/>
           </a:xfrm>
           <a:prstGeom prst="rect">
             <a:avLst/>
@@ -10610,8 +10610,8 @@
         </p:nvSpPr>
         <p:spPr>
           <a:xfrm>
-            <a:off x="7168713" y="4892040"/>
-            <a:ext cx="1962851" cy="274320"/>
+            <a:off x="7104705" y="4818888"/>
+            <a:ext cx="1834835" cy="274320"/>
           </a:xfrm>
           <a:prstGeom prst="rect">
             <a:avLst/>
@@ -10649,8 +10649,8 @@
         </p:nvSpPr>
         <p:spPr>
           <a:xfrm>
-            <a:off x="7168713" y="5212080"/>
-            <a:ext cx="1962851" cy="640080"/>
+            <a:off x="7104705" y="5120640"/>
+            <a:ext cx="1834835" cy="411480"/>
           </a:xfrm>
           <a:prstGeom prst="rect">
             <a:avLst/>
@@ -10688,8 +10688,8 @@
         </p:nvSpPr>
         <p:spPr>
           <a:xfrm>
-            <a:off x="9314444" y="4892040"/>
-            <a:ext cx="1962851" cy="274320"/>
+            <a:off x="9122420" y="4818888"/>
+            <a:ext cx="1834835" cy="274320"/>
           </a:xfrm>
           <a:prstGeom prst="rect">
             <a:avLst/>
@@ -10727,8 +10727,8 @@
         </p:nvSpPr>
         <p:spPr>
           <a:xfrm>
-            <a:off x="9314444" y="5212080"/>
-            <a:ext cx="1962851" cy="640080"/>
+            <a:off x="9122420" y="5120640"/>
+            <a:ext cx="1834835" cy="411480"/>
           </a:xfrm>
           <a:prstGeom prst="rect">
             <a:avLst/>
@@ -10798,8 +10798,8 @@
         </p:nvSpPr>
         <p:spPr>
           <a:xfrm>
-            <a:off x="457200" y="384048"/>
-            <a:ext cx="8961120" cy="274320"/>
+            <a:off x="685800" y="502920"/>
+            <a:ext cx="8595360" cy="274320"/>
           </a:xfrm>
           <a:prstGeom prst="rect">
             <a:avLst/>
@@ -10837,8 +10837,8 @@
         </p:nvSpPr>
         <p:spPr>
           <a:xfrm>
-            <a:off x="457200" y="676656"/>
-            <a:ext cx="11274552" cy="868680"/>
+            <a:off x="685800" y="804672"/>
+            <a:ext cx="10820095" cy="566928"/>
           </a:xfrm>
           <a:prstGeom prst="rect">
             <a:avLst/>
@@ -10857,7 +10857,7 @@
               <a:buNone/>
             </a:pPr>
             <a:r>
-              <a:rPr lang="en-US" sz="3000" b="1" dirty="0">
+              <a:rPr lang="en-US" sz="2800" b="1" dirty="0">
                 <a:solidFill>
                   <a:srgbClr val="222731"/>
                 </a:solidFill>
@@ -10865,9 +10865,9 @@
                 <a:ea typeface="Bricolage Grotesque" pitchFamily="34" charset="-122"/>
                 <a:cs typeface="Bricolage Grotesque" pitchFamily="34" charset="-120"/>
               </a:rPr>
-              <a:t>Felis sollicitudin mauris integer in mauris eu nibh euismod gravida</a:t>
-            </a:r>
-            <a:endParaRPr lang="en-US" sz="3000" dirty="0"/>
+              <a:t>Felis sollicitudin mauris integer in mauris</a:t>
+            </a:r>
+            <a:endParaRPr lang="en-US" sz="2800" dirty="0"/>
           </a:p>
         </p:txBody>
       </p:sp>
@@ -10879,7 +10879,7 @@
         </p:nvSpPr>
         <p:spPr>
           <a:xfrm>
-            <a:off x="457200" y="6400800"/>
+            <a:off x="685800" y="6400800"/>
             <a:ext cx="4389120" cy="256032"/>
           </a:xfrm>
           <a:prstGeom prst="rect">
@@ -10919,7 +10919,7 @@
         <p:spPr>
           <a:xfrm>
             <a:off x="4937760" y="6400800"/>
-            <a:ext cx="5943600" cy="256032"/>
+            <a:ext cx="5790895" cy="256032"/>
           </a:xfrm>
           <a:prstGeom prst="rect">
             <a:avLst/>
@@ -10957,7 +10957,7 @@
         </p:nvSpPr>
         <p:spPr>
           <a:xfrm>
-            <a:off x="11091672" y="6400800"/>
+            <a:off x="10865815" y="6400800"/>
             <a:ext cx="640080" cy="256032"/>
           </a:xfrm>
           <a:prstGeom prst="rect">
@@ -10996,7 +10996,7 @@
         </p:nvSpPr>
         <p:spPr>
           <a:xfrm>
-            <a:off x="640080" y="1737360"/>
+            <a:off x="685800" y="1691640"/>
             <a:ext cx="1463040" cy="310896"/>
           </a:xfrm>
           <a:prstGeom prst="roundRect">
@@ -11023,7 +11023,7 @@
         </p:nvSpPr>
         <p:spPr>
           <a:xfrm>
-            <a:off x="640080" y="1737360"/>
+            <a:off x="685800" y="1691640"/>
             <a:ext cx="1463040" cy="310896"/>
           </a:xfrm>
           <a:prstGeom prst="rect">
@@ -11062,8 +11062,8 @@
         </p:nvSpPr>
         <p:spPr>
           <a:xfrm>
-            <a:off x="766466" y="2219605"/>
-            <a:ext cx="1464162" cy="3104265"/>
+            <a:off x="758513" y="2212629"/>
+            <a:ext cx="1319808" cy="2798210"/>
           </a:xfrm>
           <a:prstGeom prst="roundRect">
             <a:avLst>
@@ -11089,8 +11089,8 @@
         </p:nvSpPr>
         <p:spPr>
           <a:xfrm>
-            <a:off x="857906" y="3497418"/>
-            <a:ext cx="1281282" cy="548640"/>
+            <a:off x="849953" y="3337414"/>
+            <a:ext cx="1136928" cy="548640"/>
           </a:xfrm>
           <a:prstGeom prst="rect">
             <a:avLst/>
@@ -11154,7 +11154,7 @@
         <p:spPr>
           <a:xfrm>
             <a:off x="685800" y="2148840"/>
-            <a:ext cx="1623060" cy="3246120"/>
+            <a:ext cx="1463040" cy="2926080"/>
           </a:xfrm>
           <a:prstGeom prst="rect">
             <a:avLst/>
@@ -11169,8 +11169,8 @@
         </p:nvSpPr>
         <p:spPr>
           <a:xfrm>
-            <a:off x="2537460" y="2240280"/>
-            <a:ext cx="1404518" cy="1463040"/>
+            <a:off x="2423160" y="2240280"/>
+            <a:ext cx="1686458" cy="1097280"/>
           </a:xfrm>
           <a:prstGeom prst="rect">
             <a:avLst/>
@@ -11194,7 +11194,7 @@
                 <a:ea typeface="Hanken Grotesk" pitchFamily="34" charset="-122"/>
                 <a:cs typeface="Hanken Grotesk" pitchFamily="34" charset="-120"/>
               </a:rPr>
-              <a:t>Ad minim veniam quis nostrud exercitation ullamco laboris.</a:t>
+              <a:t>Ad minim veniam quis nostrud exercitation.</a:t>
             </a:r>
             <a:endParaRPr lang="en-US" sz="1350" dirty="0"/>
           </a:p>
@@ -11208,8 +11208,8 @@
         </p:nvSpPr>
         <p:spPr>
           <a:xfrm>
-            <a:off x="2537460" y="3886200"/>
-            <a:ext cx="1404518" cy="548640"/>
+            <a:off x="2423160" y="3566160"/>
+            <a:ext cx="1686458" cy="548640"/>
           </a:xfrm>
           <a:prstGeom prst="rect">
             <a:avLst/>
@@ -11247,8 +11247,8 @@
         </p:nvSpPr>
         <p:spPr>
           <a:xfrm>
-            <a:off x="2537460" y="4434840"/>
-            <a:ext cx="1404518" cy="274320"/>
+            <a:off x="2423160" y="4114800"/>
+            <a:ext cx="1686458" cy="274320"/>
           </a:xfrm>
           <a:prstGeom prst="rect">
             <a:avLst/>
@@ -11286,7 +11286,7 @@
         </p:nvSpPr>
         <p:spPr>
           <a:xfrm>
-            <a:off x="4399178" y="1737360"/>
+            <a:off x="4383938" y="1691640"/>
             <a:ext cx="1463040" cy="310896"/>
           </a:xfrm>
           <a:prstGeom prst="roundRect">
@@ -11313,7 +11313,7 @@
         </p:nvSpPr>
         <p:spPr>
           <a:xfrm>
-            <a:off x="4399178" y="1737360"/>
+            <a:off x="4383938" y="1691640"/>
             <a:ext cx="1463040" cy="310896"/>
           </a:xfrm>
           <a:prstGeom prst="rect">
@@ -11352,8 +11352,8 @@
         </p:nvSpPr>
         <p:spPr>
           <a:xfrm>
-            <a:off x="4525564" y="2219605"/>
-            <a:ext cx="1464162" cy="3104265"/>
+            <a:off x="4456651" y="2212629"/>
+            <a:ext cx="1319808" cy="2798210"/>
           </a:xfrm>
           <a:prstGeom prst="roundRect">
             <a:avLst>
@@ -11379,8 +11379,8 @@
         </p:nvSpPr>
         <p:spPr>
           <a:xfrm>
-            <a:off x="4617004" y="3497418"/>
-            <a:ext cx="1281282" cy="548640"/>
+            <a:off x="4548091" y="3337414"/>
+            <a:ext cx="1136928" cy="548640"/>
           </a:xfrm>
           <a:prstGeom prst="rect">
             <a:avLst/>
@@ -11443,8 +11443,8 @@
         </p:blipFill>
         <p:spPr>
           <a:xfrm>
-            <a:off x="4444898" y="2148840"/>
-            <a:ext cx="1623060" cy="3246120"/>
+            <a:off x="4383938" y="2148840"/>
+            <a:ext cx="1463040" cy="2926080"/>
           </a:xfrm>
           <a:prstGeom prst="rect">
             <a:avLst/>
@@ -11459,8 +11459,8 @@
         </p:nvSpPr>
         <p:spPr>
           <a:xfrm>
-            <a:off x="6296558" y="2240280"/>
-            <a:ext cx="1404518" cy="1463040"/>
+            <a:off x="6121298" y="2240280"/>
+            <a:ext cx="1686458" cy="1097280"/>
           </a:xfrm>
           <a:prstGeom prst="rect">
             <a:avLst/>
@@ -11484,7 +11484,7 @@
                 <a:ea typeface="Hanken Grotesk" pitchFamily="34" charset="-122"/>
                 <a:cs typeface="Hanken Grotesk" pitchFamily="34" charset="-120"/>
               </a:rPr>
-              <a:t>Fugiat nulla pariatur excepteur sint occaecat cupidatat non.</a:t>
+              <a:t>Fugiat nulla pariatur excepteur sint occaecat.</a:t>
             </a:r>
             <a:endParaRPr lang="en-US" sz="1350" dirty="0"/>
           </a:p>
@@ -11498,8 +11498,8 @@
         </p:nvSpPr>
         <p:spPr>
           <a:xfrm>
-            <a:off x="6296558" y="3886200"/>
-            <a:ext cx="1404518" cy="548640"/>
+            <a:off x="6121298" y="3566160"/>
+            <a:ext cx="1686458" cy="548640"/>
           </a:xfrm>
           <a:prstGeom prst="rect">
             <a:avLst/>
@@ -11537,8 +11537,8 @@
         </p:nvSpPr>
         <p:spPr>
           <a:xfrm>
-            <a:off x="6296558" y="4434840"/>
-            <a:ext cx="1404518" cy="274320"/>
+            <a:off x="6121298" y="4114800"/>
+            <a:ext cx="1686458" cy="274320"/>
           </a:xfrm>
           <a:prstGeom prst="rect">
             <a:avLst/>
@@ -11576,7 +11576,7 @@
         </p:nvSpPr>
         <p:spPr>
           <a:xfrm>
-            <a:off x="8158277" y="1737360"/>
+            <a:off x="8082077" y="1691640"/>
             <a:ext cx="1463040" cy="310896"/>
           </a:xfrm>
           <a:prstGeom prst="roundRect">
@@ -11603,7 +11603,7 @@
         </p:nvSpPr>
         <p:spPr>
           <a:xfrm>
-            <a:off x="8158277" y="1737360"/>
+            <a:off x="8082077" y="1691640"/>
             <a:ext cx="1463040" cy="310896"/>
           </a:xfrm>
           <a:prstGeom prst="rect">
@@ -11642,8 +11642,8 @@
         </p:nvSpPr>
         <p:spPr>
           <a:xfrm>
-            <a:off x="8284663" y="2219605"/>
-            <a:ext cx="1464162" cy="3104265"/>
+            <a:off x="8154790" y="2212629"/>
+            <a:ext cx="1319808" cy="2798210"/>
           </a:xfrm>
           <a:prstGeom prst="roundRect">
             <a:avLst>
@@ -11669,8 +11669,8 @@
         </p:nvSpPr>
         <p:spPr>
           <a:xfrm>
-            <a:off x="8376103" y="3497418"/>
-            <a:ext cx="1281282" cy="548640"/>
+            <a:off x="8246230" y="3337414"/>
+            <a:ext cx="1136928" cy="548640"/>
           </a:xfrm>
           <a:prstGeom prst="rect">
             <a:avLst/>
@@ -11733,8 +11733,8 @@
         </p:blipFill>
         <p:spPr>
           <a:xfrm>
-            <a:off x="8203997" y="2148840"/>
-            <a:ext cx="1623060" cy="3246120"/>
+            <a:off x="8082077" y="2148840"/>
+            <a:ext cx="1463040" cy="2926080"/>
           </a:xfrm>
           <a:prstGeom prst="rect">
             <a:avLst/>
@@ -11749,8 +11749,8 @@
         </p:nvSpPr>
         <p:spPr>
           <a:xfrm>
-            <a:off x="10055657" y="2240280"/>
-            <a:ext cx="1404518" cy="1463040"/>
+            <a:off x="9819437" y="2240280"/>
+            <a:ext cx="1686458" cy="1097280"/>
           </a:xfrm>
           <a:prstGeom prst="rect">
             <a:avLst/>
@@ -11774,7 +11774,7 @@
                 <a:ea typeface="Hanken Grotesk" pitchFamily="34" charset="-122"/>
                 <a:cs typeface="Hanken Grotesk" pitchFamily="34" charset="-120"/>
               </a:rPr>
-              <a:t>Odio nullam varius turpis et commodo pharetra est.</a:t>
+              <a:t>Odio nullam varius turpis et commodo.</a:t>
             </a:r>
             <a:endParaRPr lang="en-US" sz="1350" dirty="0"/>
           </a:p>
@@ -11788,8 +11788,8 @@
         </p:nvSpPr>
         <p:spPr>
           <a:xfrm>
-            <a:off x="10055657" y="3886200"/>
-            <a:ext cx="1404518" cy="548640"/>
+            <a:off x="9819437" y="3566160"/>
+            <a:ext cx="1686458" cy="548640"/>
           </a:xfrm>
           <a:prstGeom prst="rect">
             <a:avLst/>
@@ -11827,8 +11827,8 @@
         </p:nvSpPr>
         <p:spPr>
           <a:xfrm>
-            <a:off x="10055657" y="4434840"/>
-            <a:ext cx="1404518" cy="274320"/>
+            <a:off x="9819437" y="4114800"/>
+            <a:ext cx="1686458" cy="274320"/>
           </a:xfrm>
           <a:prstGeom prst="rect">
             <a:avLst/>
@@ -11866,12 +11866,12 @@
         </p:nvSpPr>
         <p:spPr>
           <a:xfrm>
-            <a:off x="457200" y="5577840"/>
-            <a:ext cx="11277295" cy="640080"/>
+            <a:off x="685800" y="5349240"/>
+            <a:ext cx="10820095" cy="502920"/>
           </a:xfrm>
           <a:prstGeom prst="roundRect">
             <a:avLst>
-              <a:gd name="adj" fmla="val 17143"/>
+              <a:gd name="adj" fmla="val 21818"/>
             </a:avLst>
           </a:prstGeom>
           <a:solidFill>
@@ -11893,8 +11893,8 @@
         </p:nvSpPr>
         <p:spPr>
           <a:xfrm>
-            <a:off x="731520" y="5577840"/>
-            <a:ext cx="10728655" cy="640080"/>
+            <a:off x="1051560" y="5349240"/>
+            <a:ext cx="10088575" cy="502920"/>
           </a:xfrm>
           <a:prstGeom prst="rect">
             <a:avLst/>
@@ -11932,7 +11932,7 @@
                 <a:ea typeface="Hanken Grotesk" pitchFamily="34" charset="-122"/>
                 <a:cs typeface="Hanken Grotesk" pitchFamily="34" charset="-120"/>
               </a:rPr>
-              <a:t>Nostrud exercitation ullamco laboris nisi ut aliquip ex ea commodo consequat duis aute irure dolor in reprehenderit in voluptate velit.</a:t>
+              <a:t>Nostrud exercitation ullamco laboris nisi ut aliquip ex ea commodo consequat duis aute irure.</a:t>
             </a:r>
             <a:endParaRPr lang="en-US" sz="1350" dirty="0"/>
           </a:p>
@@ -11978,8 +11978,8 @@
         </p:nvSpPr>
         <p:spPr>
           <a:xfrm>
-            <a:off x="457200" y="384048"/>
-            <a:ext cx="8961120" cy="274320"/>
+            <a:off x="685800" y="502920"/>
+            <a:ext cx="8595360" cy="274320"/>
           </a:xfrm>
           <a:prstGeom prst="rect">
             <a:avLst/>
@@ -12017,8 +12017,8 @@
         </p:nvSpPr>
         <p:spPr>
           <a:xfrm>
-            <a:off x="457200" y="676656"/>
-            <a:ext cx="11274552" cy="868680"/>
+            <a:off x="685800" y="804672"/>
+            <a:ext cx="10820095" cy="566928"/>
           </a:xfrm>
           <a:prstGeom prst="rect">
             <a:avLst/>
@@ -12037,7 +12037,7 @@
               <a:buNone/>
             </a:pPr>
             <a:r>
-              <a:rPr lang="en-US" sz="3000" b="1" dirty="0">
+              <a:rPr lang="en-US" sz="2800" b="1" dirty="0">
                 <a:solidFill>
                   <a:srgbClr val="222731"/>
                 </a:solidFill>
@@ -12045,9 +12045,9 @@
                 <a:ea typeface="Bricolage Grotesque" pitchFamily="34" charset="-122"/>
                 <a:cs typeface="Bricolage Grotesque" pitchFamily="34" charset="-120"/>
               </a:rPr>
-              <a:t>Tempor incididunt ut labore et dolore magna aliqua ut enim ad</a:t>
-            </a:r>
-            <a:endParaRPr lang="en-US" sz="3000" dirty="0"/>
+              <a:t>Tempor incididunt ut labore et dolore magna</a:t>
+            </a:r>
+            <a:endParaRPr lang="en-US" sz="2800" dirty="0"/>
           </a:p>
         </p:txBody>
       </p:sp>
@@ -12059,7 +12059,7 @@
         </p:nvSpPr>
         <p:spPr>
           <a:xfrm>
-            <a:off x="457200" y="6400800"/>
+            <a:off x="685800" y="6400800"/>
             <a:ext cx="4389120" cy="256032"/>
           </a:xfrm>
           <a:prstGeom prst="rect">
@@ -12099,7 +12099,7 @@
         <p:spPr>
           <a:xfrm>
             <a:off x="4937760" y="6400800"/>
-            <a:ext cx="5943600" cy="256032"/>
+            <a:ext cx="5790895" cy="256032"/>
           </a:xfrm>
           <a:prstGeom prst="rect">
             <a:avLst/>
@@ -12137,7 +12137,7 @@
         </p:nvSpPr>
         <p:spPr>
           <a:xfrm>
-            <a:off x="11091672" y="6400800"/>
+            <a:off x="10865815" y="6400800"/>
             <a:ext cx="640080" cy="256032"/>
           </a:xfrm>
           <a:prstGeom prst="rect">
@@ -12176,12 +12176,12 @@
         </p:nvSpPr>
         <p:spPr>
           <a:xfrm>
-            <a:off x="457200" y="1783080"/>
-            <a:ext cx="3291840" cy="1298448"/>
+            <a:off x="685800" y="1691640"/>
+            <a:ext cx="3108960" cy="1173480"/>
           </a:xfrm>
           <a:prstGeom prst="roundRect">
             <a:avLst>
-              <a:gd name="adj" fmla="val 8451"/>
+              <a:gd name="adj" fmla="val 9351"/>
             </a:avLst>
           </a:prstGeom>
           <a:solidFill>
@@ -12203,8 +12203,8 @@
         </p:nvSpPr>
         <p:spPr>
           <a:xfrm>
-            <a:off x="731520" y="1965960"/>
-            <a:ext cx="2743200" cy="274320"/>
+            <a:off x="1051560" y="1920240"/>
+            <a:ext cx="2377440" cy="274320"/>
           </a:xfrm>
           <a:prstGeom prst="rect">
             <a:avLst/>
@@ -12242,8 +12242,8 @@
         </p:nvSpPr>
         <p:spPr>
           <a:xfrm>
-            <a:off x="731520" y="2240280"/>
-            <a:ext cx="1645920" cy="640080"/>
+            <a:off x="1051560" y="2194560"/>
+            <a:ext cx="1463040" cy="548640"/>
           </a:xfrm>
           <a:prstGeom prst="rect">
             <a:avLst/>
@@ -12281,8 +12281,8 @@
         </p:nvSpPr>
         <p:spPr>
           <a:xfrm>
-            <a:off x="2286000" y="2350008"/>
-            <a:ext cx="1371600" cy="365760"/>
+            <a:off x="2468880" y="2295144"/>
+            <a:ext cx="960120" cy="365760"/>
           </a:xfrm>
           <a:prstGeom prst="rect">
             <a:avLst/>
@@ -12320,12 +12320,12 @@
         </p:nvSpPr>
         <p:spPr>
           <a:xfrm>
-            <a:off x="457200" y="3246120"/>
-            <a:ext cx="3291840" cy="1298448"/>
+            <a:off x="685800" y="3139440"/>
+            <a:ext cx="3108960" cy="1173480"/>
           </a:xfrm>
           <a:prstGeom prst="roundRect">
             <a:avLst>
-              <a:gd name="adj" fmla="val 8451"/>
+              <a:gd name="adj" fmla="val 9351"/>
             </a:avLst>
           </a:prstGeom>
           <a:solidFill>
@@ -12347,8 +12347,8 @@
         </p:nvSpPr>
         <p:spPr>
           <a:xfrm>
-            <a:off x="731520" y="3429000"/>
-            <a:ext cx="2743200" cy="274320"/>
+            <a:off x="1051560" y="3368040"/>
+            <a:ext cx="2377440" cy="274320"/>
           </a:xfrm>
           <a:prstGeom prst="rect">
             <a:avLst/>
@@ -12386,8 +12386,8 @@
         </p:nvSpPr>
         <p:spPr>
           <a:xfrm>
-            <a:off x="731520" y="3703320"/>
-            <a:ext cx="1645920" cy="640080"/>
+            <a:off x="1051560" y="3642360"/>
+            <a:ext cx="1463040" cy="548640"/>
           </a:xfrm>
           <a:prstGeom prst="rect">
             <a:avLst/>
@@ -12425,8 +12425,8 @@
         </p:nvSpPr>
         <p:spPr>
           <a:xfrm>
-            <a:off x="2286000" y="3813048"/>
-            <a:ext cx="1371600" cy="365760"/>
+            <a:off x="2468880" y="3742944"/>
+            <a:ext cx="960120" cy="365760"/>
           </a:xfrm>
           <a:prstGeom prst="rect">
             <a:avLst/>
@@ -12464,12 +12464,12 @@
         </p:nvSpPr>
         <p:spPr>
           <a:xfrm>
-            <a:off x="457200" y="4709160"/>
-            <a:ext cx="3291840" cy="1298448"/>
+            <a:off x="685800" y="4587240"/>
+            <a:ext cx="3108960" cy="1173480"/>
           </a:xfrm>
           <a:prstGeom prst="roundRect">
             <a:avLst>
-              <a:gd name="adj" fmla="val 8451"/>
+              <a:gd name="adj" fmla="val 9351"/>
             </a:avLst>
           </a:prstGeom>
           <a:solidFill>
@@ -12491,8 +12491,8 @@
         </p:nvSpPr>
         <p:spPr>
           <a:xfrm>
-            <a:off x="731520" y="4892040"/>
-            <a:ext cx="2743200" cy="274320"/>
+            <a:off x="1051560" y="4815840"/>
+            <a:ext cx="2377440" cy="274320"/>
           </a:xfrm>
           <a:prstGeom prst="rect">
             <a:avLst/>
@@ -12516,7 +12516,7 @@
                 <a:ea typeface="Hanken Grotesk" pitchFamily="34" charset="-122"/>
                 <a:cs typeface="Hanken Grotesk" pitchFamily="34" charset="-120"/>
               </a:rPr>
-              <a:t>VARIANT B</a:t>
+              <a:t>VARIANT B · WINNER</a:t>
             </a:r>
             <a:endParaRPr lang="en-US" sz="1050" dirty="0"/>
           </a:p>
@@ -12530,8 +12530,8 @@
         </p:nvSpPr>
         <p:spPr>
           <a:xfrm>
-            <a:off x="731520" y="5166360"/>
-            <a:ext cx="1645920" cy="640080"/>
+            <a:off x="1051560" y="5090160"/>
+            <a:ext cx="1463040" cy="548640"/>
           </a:xfrm>
           <a:prstGeom prst="rect">
             <a:avLst/>
@@ -12569,8 +12569,8 @@
         </p:nvSpPr>
         <p:spPr>
           <a:xfrm>
-            <a:off x="2286000" y="5276088"/>
-            <a:ext cx="1371600" cy="365760"/>
+            <a:off x="2468880" y="5190744"/>
+            <a:ext cx="960120" cy="365760"/>
           </a:xfrm>
           <a:prstGeom prst="rect">
             <a:avLst/>
@@ -12594,7 +12594,7 @@
                 <a:ea typeface="Hanken Grotesk" pitchFamily="34" charset="-122"/>
                 <a:cs typeface="Hanken Grotesk" pitchFamily="34" charset="-120"/>
               </a:rPr>
-              <a:t>+2.7 pts · winner</a:t>
+              <a:t>+2.7 pts</a:t>
             </a:r>
             <a:endParaRPr lang="en-US" sz="1050" dirty="0"/>
           </a:p>
@@ -12608,12 +12608,12 @@
         </p:nvSpPr>
         <p:spPr>
           <a:xfrm>
-            <a:off x="4023360" y="1783080"/>
-            <a:ext cx="7711135" cy="3383280"/>
+            <a:off x="4069080" y="1691640"/>
+            <a:ext cx="7436815" cy="3063240"/>
           </a:xfrm>
           <a:prstGeom prst="roundRect">
             <a:avLst>
-              <a:gd name="adj" fmla="val 3243"/>
+              <a:gd name="adj" fmla="val 3582"/>
             </a:avLst>
           </a:prstGeom>
           <a:solidFill>
@@ -12635,8 +12635,8 @@
         </p:nvSpPr>
         <p:spPr>
           <a:xfrm>
-            <a:off x="4297680" y="1965960"/>
-            <a:ext cx="5486400" cy="274320"/>
+            <a:off x="4434840" y="2011680"/>
+            <a:ext cx="6705295" cy="274320"/>
           </a:xfrm>
           <a:prstGeom prst="rect">
             <a:avLst/>
@@ -12673,8 +12673,8 @@
           <p:nvPr/>
         </p:nvGraphicFramePr>
         <p:xfrm>
-          <a:off x="4206240" y="2240280"/>
-          <a:ext cx="7345375" cy="2834640"/>
+          <a:off x="4297680" y="2377440"/>
+          <a:ext cx="6979615" cy="2194560"/>
         </p:xfrm>
         <a:graphic xmlns:a="http://schemas.openxmlformats.org/drawingml/2006/main">
           <a:graphicData uri="http://schemas.openxmlformats.org/drawingml/2006/chart">
@@ -12690,12 +12690,12 @@
         </p:nvSpPr>
         <p:spPr>
           <a:xfrm>
-            <a:off x="4023360" y="5349240"/>
-            <a:ext cx="7711135" cy="777240"/>
+            <a:off x="4069080" y="5029200"/>
+            <a:ext cx="7436815" cy="731520"/>
           </a:xfrm>
           <a:prstGeom prst="roundRect">
             <a:avLst>
-              <a:gd name="adj" fmla="val 14118"/>
+              <a:gd name="adj" fmla="val 15000"/>
             </a:avLst>
           </a:prstGeom>
           <a:solidFill>
@@ -12717,8 +12717,8 @@
         </p:nvSpPr>
         <p:spPr>
           <a:xfrm>
-            <a:off x="4297680" y="5349240"/>
-            <a:ext cx="7162495" cy="777240"/>
+            <a:off x="4434840" y="5029200"/>
+            <a:ext cx="6705295" cy="731520"/>
           </a:xfrm>
           <a:prstGeom prst="rect">
             <a:avLst/>
@@ -12756,7 +12756,7 @@
                 <a:ea typeface="Hanken Grotesk" pitchFamily="34" charset="-122"/>
                 <a:cs typeface="Hanken Grotesk" pitchFamily="34" charset="-120"/>
               </a:rPr>
-              <a:t>p = 0.01 · 95% CI +1.1 to +4.3 pts · n = 12,000 · Ad minim veniam quis nostrud exercitation</a:t>
+              <a:t>p = 0.01 · 95% CI +1.1 to +4.3 pts · n = 12,000</a:t>
             </a:r>
             <a:endParaRPr lang="en-US" sz="1350" dirty="0"/>
           </a:p>
@@ -12802,8 +12802,8 @@
         </p:nvSpPr>
         <p:spPr>
           <a:xfrm>
-            <a:off x="457200" y="384048"/>
-            <a:ext cx="8961120" cy="274320"/>
+            <a:off x="685800" y="502920"/>
+            <a:ext cx="8595360" cy="274320"/>
           </a:xfrm>
           <a:prstGeom prst="rect">
             <a:avLst/>
@@ -12841,8 +12841,8 @@
         </p:nvSpPr>
         <p:spPr>
           <a:xfrm>
-            <a:off x="457200" y="676656"/>
-            <a:ext cx="11274552" cy="868680"/>
+            <a:off x="685800" y="804672"/>
+            <a:ext cx="10820095" cy="566928"/>
           </a:xfrm>
           <a:prstGeom prst="rect">
             <a:avLst/>
@@ -12861,7 +12861,7 @@
               <a:buNone/>
             </a:pPr>
             <a:r>
-              <a:rPr lang="en-US" sz="3000" b="1" dirty="0">
+              <a:rPr lang="en-US" sz="2800" b="1" dirty="0">
                 <a:solidFill>
                   <a:srgbClr val="222731"/>
                 </a:solidFill>
@@ -12869,9 +12869,9 @@
                 <a:ea typeface="Bricolage Grotesque" pitchFamily="34" charset="-122"/>
                 <a:cs typeface="Bricolage Grotesque" pitchFamily="34" charset="-120"/>
               </a:rPr>
-              <a:t>Ex ea commodo consequat duis aute irure dolor in</a:t>
-            </a:r>
-            <a:endParaRPr lang="en-US" sz="3000" dirty="0"/>
+              <a:t>Ex ea commodo consequat duis aute</a:t>
+            </a:r>
+            <a:endParaRPr lang="en-US" sz="2800" dirty="0"/>
           </a:p>
         </p:txBody>
       </p:sp>
@@ -12883,7 +12883,7 @@
         </p:nvSpPr>
         <p:spPr>
           <a:xfrm>
-            <a:off x="457200" y="6400800"/>
+            <a:off x="685800" y="6400800"/>
             <a:ext cx="4389120" cy="256032"/>
           </a:xfrm>
           <a:prstGeom prst="rect">
@@ -12923,7 +12923,7 @@
         <p:spPr>
           <a:xfrm>
             <a:off x="4937760" y="6400800"/>
-            <a:ext cx="5943600" cy="256032"/>
+            <a:ext cx="5790895" cy="256032"/>
           </a:xfrm>
           <a:prstGeom prst="rect">
             <a:avLst/>
@@ -12961,7 +12961,7 @@
         </p:nvSpPr>
         <p:spPr>
           <a:xfrm>
-            <a:off x="11091672" y="6400800"/>
+            <a:off x="10865815" y="6400800"/>
             <a:ext cx="640080" cy="256032"/>
           </a:xfrm>
           <a:prstGeom prst="rect">
@@ -13000,12 +13000,12 @@
         </p:nvSpPr>
         <p:spPr>
           <a:xfrm>
-            <a:off x="457200" y="1783080"/>
-            <a:ext cx="3576218" cy="4343400"/>
+            <a:off x="685800" y="1691640"/>
+            <a:ext cx="3423818" cy="4069080"/>
           </a:xfrm>
           <a:prstGeom prst="roundRect">
             <a:avLst>
-              <a:gd name="adj" fmla="val 3068"/>
+              <a:gd name="adj" fmla="val 3205"/>
             </a:avLst>
           </a:prstGeom>
           <a:solidFill>
@@ -13027,8 +13027,8 @@
         </p:nvSpPr>
         <p:spPr>
           <a:xfrm>
-            <a:off x="777240" y="2103120"/>
-            <a:ext cx="658368" cy="658368"/>
+            <a:off x="1051560" y="2057400"/>
+            <a:ext cx="585216" cy="585216"/>
           </a:xfrm>
           <a:prstGeom prst="roundRect">
             <a:avLst>
@@ -13062,8 +13062,8 @@
         </p:blipFill>
         <p:spPr>
           <a:xfrm>
-            <a:off x="908914" y="2234794"/>
-            <a:ext cx="395021" cy="395021"/>
+            <a:off x="1168603" y="2174443"/>
+            <a:ext cx="351130" cy="351130"/>
           </a:xfrm>
           <a:prstGeom prst="rect">
             <a:avLst/>
@@ -13078,8 +13078,8 @@
         </p:nvSpPr>
         <p:spPr>
           <a:xfrm>
-            <a:off x="777240" y="2953512"/>
-            <a:ext cx="2936138" cy="274320"/>
+            <a:off x="1051560" y="2880360"/>
+            <a:ext cx="2692298" cy="274320"/>
           </a:xfrm>
           <a:prstGeom prst="rect">
             <a:avLst/>
@@ -13117,8 +13117,8 @@
         </p:nvSpPr>
         <p:spPr>
           <a:xfrm>
-            <a:off x="777240" y="3246120"/>
-            <a:ext cx="2936138" cy="731520"/>
+            <a:off x="1051560" y="3200400"/>
+            <a:ext cx="2692298" cy="731520"/>
           </a:xfrm>
           <a:prstGeom prst="rect">
             <a:avLst/>
@@ -13134,7 +13134,7 @@
               <a:buNone/>
             </a:pPr>
             <a:r>
-              <a:rPr lang="en-US" sz="2000" b="1" dirty="0">
+              <a:rPr lang="en-US" sz="1900" b="1" dirty="0">
                 <a:solidFill>
                   <a:srgbClr val="222731"/>
                 </a:solidFill>
@@ -13144,7 +13144,7 @@
               </a:rPr>
               <a:t>Varius turpis et commodo</a:t>
             </a:r>
-            <a:endParaRPr lang="en-US" sz="2000" dirty="0"/>
+            <a:endParaRPr lang="en-US" sz="1900" dirty="0"/>
           </a:p>
         </p:txBody>
       </p:sp>
@@ -13156,8 +13156,8 @@
         </p:nvSpPr>
         <p:spPr>
           <a:xfrm>
-            <a:off x="777240" y="4069080"/>
-            <a:ext cx="2936138" cy="1828800"/>
+            <a:off x="1051560" y="4023360"/>
+            <a:ext cx="2692298" cy="1371600"/>
           </a:xfrm>
           <a:prstGeom prst="rect">
             <a:avLst/>
@@ -13181,7 +13181,7 @@
                 <a:ea typeface="Hanken Grotesk" pitchFamily="34" charset="-122"/>
                 <a:cs typeface="Hanken Grotesk" pitchFamily="34" charset="-120"/>
               </a:rPr>
-              <a:t>Pharetra est eros bibendum elit nec luctus magna felis sollicitudin mauris integer in mauris eu nibh euismod gravida lorem ipsum dolor sit amet consectetur adipiscing elit sed do eiusmod tempor.</a:t>
+              <a:t>Pharetra est eros bibendum elit nec luctus magna felis sollicitudin mauris integer in mauris eu nibh euismod gravida lorem ipsum.</a:t>
             </a:r>
             <a:endParaRPr lang="en-US" sz="1350" dirty="0"/>
           </a:p>
@@ -13195,12 +13195,12 @@
         </p:nvSpPr>
         <p:spPr>
           <a:xfrm>
-            <a:off x="4307738" y="1783080"/>
-            <a:ext cx="3576218" cy="4343400"/>
+            <a:off x="4383938" y="1691640"/>
+            <a:ext cx="3423818" cy="4069080"/>
           </a:xfrm>
           <a:prstGeom prst="roundRect">
             <a:avLst>
-              <a:gd name="adj" fmla="val 3068"/>
+              <a:gd name="adj" fmla="val 3205"/>
             </a:avLst>
           </a:prstGeom>
           <a:solidFill>
@@ -13222,8 +13222,8 @@
         </p:nvSpPr>
         <p:spPr>
           <a:xfrm>
-            <a:off x="4627778" y="2103120"/>
-            <a:ext cx="658368" cy="658368"/>
+            <a:off x="4749698" y="2057400"/>
+            <a:ext cx="585216" cy="585216"/>
           </a:xfrm>
           <a:prstGeom prst="roundRect">
             <a:avLst>
@@ -13257,8 +13257,8 @@
         </p:blipFill>
         <p:spPr>
           <a:xfrm>
-            <a:off x="4759452" y="2234794"/>
-            <a:ext cx="395021" cy="395021"/>
+            <a:off x="4866742" y="2174443"/>
+            <a:ext cx="351130" cy="351130"/>
           </a:xfrm>
           <a:prstGeom prst="rect">
             <a:avLst/>
@@ -13273,8 +13273,8 @@
         </p:nvSpPr>
         <p:spPr>
           <a:xfrm>
-            <a:off x="4627778" y="2953512"/>
-            <a:ext cx="2936138" cy="274320"/>
+            <a:off x="4749698" y="2880360"/>
+            <a:ext cx="2692298" cy="274320"/>
           </a:xfrm>
           <a:prstGeom prst="rect">
             <a:avLst/>
@@ -13312,8 +13312,8 @@
         </p:nvSpPr>
         <p:spPr>
           <a:xfrm>
-            <a:off x="4627778" y="3246120"/>
-            <a:ext cx="2936138" cy="731520"/>
+            <a:off x="4749698" y="3200400"/>
+            <a:ext cx="2692298" cy="731520"/>
           </a:xfrm>
           <a:prstGeom prst="rect">
             <a:avLst/>
@@ -13329,7 +13329,7 @@
               <a:buNone/>
             </a:pPr>
             <a:r>
-              <a:rPr lang="en-US" sz="2000" b="1" dirty="0">
+              <a:rPr lang="en-US" sz="1900" b="1" dirty="0">
                 <a:solidFill>
                   <a:srgbClr val="222731"/>
                 </a:solidFill>
@@ -13339,7 +13339,7 @@
               </a:rPr>
               <a:t>Ut labore et dolore</a:t>
             </a:r>
-            <a:endParaRPr lang="en-US" sz="2000" dirty="0"/>
+            <a:endParaRPr lang="en-US" sz="1900" dirty="0"/>
           </a:p>
         </p:txBody>
       </p:sp>
@@ -13351,8 +13351,8 @@
         </p:nvSpPr>
         <p:spPr>
           <a:xfrm>
-            <a:off x="4627778" y="4069080"/>
-            <a:ext cx="2936138" cy="1828800"/>
+            <a:off x="4749698" y="4023360"/>
+            <a:ext cx="2692298" cy="1371600"/>
           </a:xfrm>
           <a:prstGeom prst="rect">
             <a:avLst/>
@@ -13376,7 +13376,7 @@
                 <a:ea typeface="Hanken Grotesk" pitchFamily="34" charset="-122"/>
                 <a:cs typeface="Hanken Grotesk" pitchFamily="34" charset="-120"/>
               </a:rPr>
-              <a:t>Eiusmod tempor incididunt ut labore et dolore magna aliqua ut enim ad minim veniam quis nostrud exercitation ullamco laboris nisi ut aliquip ex ea commodo consequat duis aute irure dolor.</a:t>
+              <a:t>Eiusmod tempor incididunt ut labore et dolore magna aliqua ut enim ad minim veniam quis nostrud exercitation ullamco laboris nisi.</a:t>
             </a:r>
             <a:endParaRPr lang="en-US" sz="1350" dirty="0"/>
           </a:p>
@@ -13390,12 +13390,12 @@
         </p:nvSpPr>
         <p:spPr>
           <a:xfrm>
-            <a:off x="8158277" y="1783080"/>
-            <a:ext cx="3576218" cy="4343400"/>
+            <a:off x="8082077" y="1691640"/>
+            <a:ext cx="3423818" cy="4069080"/>
           </a:xfrm>
           <a:prstGeom prst="roundRect">
             <a:avLst>
-              <a:gd name="adj" fmla="val 3068"/>
+              <a:gd name="adj" fmla="val 3205"/>
             </a:avLst>
           </a:prstGeom>
           <a:solidFill>
@@ -13417,8 +13417,8 @@
         </p:nvSpPr>
         <p:spPr>
           <a:xfrm>
-            <a:off x="8478317" y="2103120"/>
-            <a:ext cx="658368" cy="658368"/>
+            <a:off x="8447837" y="2057400"/>
+            <a:ext cx="585216" cy="585216"/>
           </a:xfrm>
           <a:prstGeom prst="roundRect">
             <a:avLst>
@@ -13452,8 +13452,8 @@
         </p:blipFill>
         <p:spPr>
           <a:xfrm>
-            <a:off x="8609990" y="2234794"/>
-            <a:ext cx="395021" cy="395021"/>
+            <a:off x="8564880" y="2174443"/>
+            <a:ext cx="351130" cy="351130"/>
           </a:xfrm>
           <a:prstGeom prst="rect">
             <a:avLst/>
@@ -13468,8 +13468,8 @@
         </p:nvSpPr>
         <p:spPr>
           <a:xfrm>
-            <a:off x="8478317" y="2953512"/>
-            <a:ext cx="2936138" cy="274320"/>
+            <a:off x="8447837" y="2880360"/>
+            <a:ext cx="2692298" cy="274320"/>
           </a:xfrm>
           <a:prstGeom prst="rect">
             <a:avLst/>
@@ -13507,8 +13507,8 @@
         </p:nvSpPr>
         <p:spPr>
           <a:xfrm>
-            <a:off x="8478317" y="3246120"/>
-            <a:ext cx="2936138" cy="731520"/>
+            <a:off x="8447837" y="3200400"/>
+            <a:ext cx="2692298" cy="731520"/>
           </a:xfrm>
           <a:prstGeom prst="rect">
             <a:avLst/>
@@ -13524,7 +13524,7 @@
               <a:buNone/>
             </a:pPr>
             <a:r>
-              <a:rPr lang="en-US" sz="2000" b="1" dirty="0">
+              <a:rPr lang="en-US" sz="1900" b="1" dirty="0">
                 <a:solidFill>
                   <a:srgbClr val="222731"/>
                 </a:solidFill>
@@ -13534,7 +13534,7 @@
               </a:rPr>
               <a:t>Eu fugiat nulla pariatur</a:t>
             </a:r>
-            <a:endParaRPr lang="en-US" sz="2000" dirty="0"/>
+            <a:endParaRPr lang="en-US" sz="1900" dirty="0"/>
           </a:p>
         </p:txBody>
       </p:sp>
@@ -13546,8 +13546,8 @@
         </p:nvSpPr>
         <p:spPr>
           <a:xfrm>
-            <a:off x="8478317" y="4069080"/>
-            <a:ext cx="2936138" cy="1828800"/>
+            <a:off x="8447837" y="4023360"/>
+            <a:ext cx="2692298" cy="1371600"/>
           </a:xfrm>
           <a:prstGeom prst="rect">
             <a:avLst/>
@@ -13571,7 +13571,7 @@
                 <a:ea typeface="Hanken Grotesk" pitchFamily="34" charset="-122"/>
                 <a:cs typeface="Hanken Grotesk" pitchFamily="34" charset="-120"/>
               </a:rPr>
-              <a:t>Irure dolor in reprehenderit in voluptate velit esse cillum dolore eu fugiat nulla pariatur excepteur sint occaecat cupidatat non proident sunt in culpa qui officia deserunt mollit anim id est.</a:t>
+              <a:t>Irure dolor in reprehenderit in voluptate velit esse cillum dolore eu fugiat nulla pariatur excepteur sint occaecat cupidatat non proident.</a:t>
             </a:r>
             <a:endParaRPr lang="en-US" sz="1350" dirty="0"/>
           </a:p>
